--- a/data-eng/decks/w3d3s4.pptx
+++ b/data-eng/decks/w3d3s4.pptx
@@ -14,6 +14,7 @@
     <p:sldId id="262" r:id="rId13"/>
     <p:sldId id="263" r:id="rId14"/>
     <p:sldId id="264" r:id="rId15"/>
+    <p:sldId id="265" r:id="rId16"/>
   </p:sldIdLst>
   <p:sldSz cx="18288000" cy="10287000" type="screen4x3"/>
   <p:notesSz cx="6858000" cy="9144000"/>
@@ -3098,7 +3099,7 @@
       <p:grpSpPr/>
       <p:sp>
         <p:nvSpPr>
-          <p:cNvPr id="2" name="Oval 1"/>
+          <p:cNvPr id="2" name="deckgen:decor"/>
           <p:cNvSpPr/>
           <p:nvPr/>
         </p:nvSpPr>
@@ -3128,7 +3129,7 @@
       </p:sp>
       <p:sp>
         <p:nvSpPr>
-          <p:cNvPr id="3" name="Oval 2"/>
+          <p:cNvPr id="3" name="deckgen:decor"/>
           <p:cNvSpPr/>
           <p:nvPr/>
         </p:nvSpPr>
@@ -3158,7 +3159,7 @@
       </p:sp>
       <p:sp>
         <p:nvSpPr>
-          <p:cNvPr id="4" name="Oval 3"/>
+          <p:cNvPr id="4" name="deckgen:decor"/>
           <p:cNvSpPr/>
           <p:nvPr/>
         </p:nvSpPr>
@@ -3188,7 +3189,7 @@
       </p:sp>
       <p:sp>
         <p:nvSpPr>
-          <p:cNvPr id="5" name="Rectangle 4"/>
+          <p:cNvPr id="5" name="deckgen:decor"/>
           <p:cNvSpPr/>
           <p:nvPr/>
         </p:nvSpPr>
@@ -3218,7 +3219,7 @@
       </p:sp>
       <p:sp>
         <p:nvSpPr>
-          <p:cNvPr id="6" name="Oval 5"/>
+          <p:cNvPr id="6" name="deckgen:decor"/>
           <p:cNvSpPr/>
           <p:nvPr/>
         </p:nvSpPr>
@@ -3248,7 +3249,7 @@
       </p:sp>
       <p:sp>
         <p:nvSpPr>
-          <p:cNvPr id="7" name="Oval 6"/>
+          <p:cNvPr id="7" name="deckgen:decor"/>
           <p:cNvSpPr/>
           <p:nvPr/>
         </p:nvSpPr>
@@ -3278,7 +3279,7 @@
       </p:sp>
       <p:sp>
         <p:nvSpPr>
-          <p:cNvPr id="8" name="Oval 7"/>
+          <p:cNvPr id="8" name="deckgen:decor"/>
           <p:cNvSpPr/>
           <p:nvPr/>
         </p:nvSpPr>
@@ -3308,7 +3309,7 @@
       </p:sp>
       <p:sp>
         <p:nvSpPr>
-          <p:cNvPr id="9" name="Oval 8"/>
+          <p:cNvPr id="9" name="deckgen:decor"/>
           <p:cNvSpPr/>
           <p:nvPr/>
         </p:nvSpPr>
@@ -3338,7 +3339,7 @@
       </p:sp>
       <p:sp>
         <p:nvSpPr>
-          <p:cNvPr id="10" name="Rectangle 9"/>
+          <p:cNvPr id="10" name="deckgen:decor"/>
           <p:cNvSpPr/>
           <p:nvPr/>
         </p:nvSpPr>
@@ -3574,6 +3575,813 @@
                 <a:cs typeface="Pretendard"/>
               </a:rPr>
               <a:t>데이터 엔지니어링 &amp; RAG 파이프라인 160H · 3기</a:t>
+            </a:r>
+          </a:p>
+        </p:txBody>
+      </p:sp>
+    </p:spTree>
+  </p:cSld>
+  <p:clrMapOvr>
+    <a:masterClrMapping/>
+  </p:clrMapOvr>
+</p:sld>
+</file>
+
+<file path=ppt/slides/slide10.xml><?xml version="1.0" encoding="utf-8"?>
+<p:sld xmlns:a="http://schemas.openxmlformats.org/drawingml/2006/main" xmlns:p="http://schemas.openxmlformats.org/presentationml/2006/main" xmlns:r="http://schemas.openxmlformats.org/officeDocument/2006/relationships">
+  <p:cSld>
+    <p:spTree>
+      <p:nvGrpSpPr>
+        <p:cNvPr id="1" name=""/>
+        <p:cNvGrpSpPr/>
+        <p:nvPr/>
+      </p:nvGrpSpPr>
+      <p:grpSpPr/>
+      <p:sp>
+        <p:nvSpPr>
+          <p:cNvPr id="2" name="deckgen:decor"/>
+          <p:cNvSpPr/>
+          <p:nvPr/>
+        </p:nvSpPr>
+        <p:spPr>
+          <a:xfrm>
+            <a:off x="14859000" y="6667500"/>
+            <a:ext cx="5905500" cy="5905500"/>
+          </a:xfrm>
+          <a:prstGeom prst="ellipse">
+            <a:avLst/>
+          </a:prstGeom>
+          <a:solidFill>
+            <a:srgbClr val="F3F6FC"/>
+          </a:solidFill>
+          <a:ln>
+            <a:noFill/>
+          </a:ln>
+          <a:effectLst/>
+        </p:spPr>
+        <p:txBody>
+          <a:bodyPr rtlCol="0" anchor="ctr" wrap="square"/>
+          <a:lstStyle/>
+          <a:p>
+            <a:pPr algn="ctr"/>
+          </a:p>
+        </p:txBody>
+      </p:sp>
+      <p:sp>
+        <p:nvSpPr>
+          <p:cNvPr id="3" name="deckgen:decor"/>
+          <p:cNvSpPr/>
+          <p:nvPr/>
+        </p:nvSpPr>
+        <p:spPr>
+          <a:xfrm>
+            <a:off x="-2095500" y="-2095500"/>
+            <a:ext cx="4381500" cy="4381500"/>
+          </a:xfrm>
+          <a:prstGeom prst="ellipse">
+            <a:avLst/>
+          </a:prstGeom>
+          <a:solidFill>
+            <a:srgbClr val="F5F6F8"/>
+          </a:solidFill>
+          <a:ln>
+            <a:noFill/>
+          </a:ln>
+          <a:effectLst/>
+        </p:spPr>
+        <p:txBody>
+          <a:bodyPr rtlCol="0" anchor="ctr" wrap="square"/>
+          <a:lstStyle/>
+          <a:p>
+            <a:pPr algn="ctr"/>
+          </a:p>
+        </p:txBody>
+      </p:sp>
+      <p:sp>
+        <p:nvSpPr>
+          <p:cNvPr id="4" name="Rectangle 3"/>
+          <p:cNvSpPr/>
+          <p:nvPr/>
+        </p:nvSpPr>
+        <p:spPr>
+          <a:xfrm>
+            <a:off x="1143000" y="2857500"/>
+            <a:ext cx="16002000" cy="28575"/>
+          </a:xfrm>
+          <a:prstGeom prst="rect">
+            <a:avLst/>
+          </a:prstGeom>
+          <a:solidFill>
+            <a:srgbClr val="0D2B5E"/>
+          </a:solidFill>
+          <a:ln>
+            <a:noFill/>
+          </a:ln>
+          <a:effectLst/>
+        </p:spPr>
+        <p:txBody>
+          <a:bodyPr rtlCol="0" anchor="ctr" wrap="square"/>
+          <a:lstStyle/>
+          <a:p>
+            <a:pPr algn="ctr"/>
+          </a:p>
+        </p:txBody>
+      </p:sp>
+      <p:sp>
+        <p:nvSpPr>
+          <p:cNvPr id="5" name="TextBox 4"/>
+          <p:cNvSpPr txBox="1"/>
+          <p:nvPr/>
+        </p:nvSpPr>
+        <p:spPr>
+          <a:xfrm>
+            <a:off x="1143000" y="3352800"/>
+            <a:ext cx="8572500" cy="419100"/>
+          </a:xfrm>
+          <a:prstGeom prst="rect">
+            <a:avLst/>
+          </a:prstGeom>
+          <a:noFill/>
+        </p:spPr>
+        <p:txBody>
+          <a:bodyPr wrap="square" lIns="0" rIns="0" tIns="0" bIns="0" anchor="t">
+            <a:spAutoFit/>
+          </a:bodyPr>
+          <a:lstStyle/>
+          <a:p>
+            <a:pPr algn="l">
+              <a:lnSpc>
+                <a:spcPct val="100000"/>
+              </a:lnSpc>
+            </a:pPr>
+            <a:r>
+              <a:rPr sz="2400" b="1">
+                <a:solidFill>
+                  <a:srgbClr val="1E5BC6"/>
+                </a:solidFill>
+                <a:latin typeface="Pretendard"/>
+                <a:ea typeface="Pretendard"/>
+                <a:cs typeface="Pretendard"/>
+              </a:rPr>
+              <a:t>3-3 · 정리·회고 0.5H 마무리</a:t>
+            </a:r>
+          </a:p>
+        </p:txBody>
+      </p:sp>
+      <p:sp>
+        <p:nvSpPr>
+          <p:cNvPr id="6" name="TextBox 5"/>
+          <p:cNvSpPr txBox="1"/>
+          <p:nvPr/>
+        </p:nvSpPr>
+        <p:spPr>
+          <a:xfrm>
+            <a:off x="1143000" y="3771900"/>
+            <a:ext cx="16002000" cy="800100"/>
+          </a:xfrm>
+          <a:prstGeom prst="rect">
+            <a:avLst/>
+          </a:prstGeom>
+          <a:noFill/>
+        </p:spPr>
+        <p:txBody>
+          <a:bodyPr wrap="square" lIns="0" rIns="0" tIns="0" bIns="0" anchor="t">
+            <a:spAutoFit/>
+          </a:bodyPr>
+          <a:lstStyle/>
+          <a:p>
+            <a:pPr algn="l">
+              <a:lnSpc>
+                <a:spcPct val="100000"/>
+              </a:lnSpc>
+            </a:pPr>
+            <a:r>
+              <a:rPr sz="5100" b="1">
+                <a:solidFill>
+                  <a:srgbClr val="0D2B5E"/>
+                </a:solidFill>
+                <a:latin typeface="Pretendard"/>
+                <a:ea typeface="Pretendard"/>
+                <a:cs typeface="Pretendard"/>
+              </a:rPr>
+              <a:t>다음 회차는 3-4 DuckDB 데이터 분석</a:t>
+            </a:r>
+          </a:p>
+        </p:txBody>
+      </p:sp>
+      <p:sp>
+        <p:nvSpPr>
+          <p:cNvPr id="7" name="TextBox 6"/>
+          <p:cNvSpPr txBox="1"/>
+          <p:nvPr/>
+        </p:nvSpPr>
+        <p:spPr>
+          <a:xfrm>
+            <a:off x="1143000" y="4724400"/>
+            <a:ext cx="16002000" cy="438150"/>
+          </a:xfrm>
+          <a:prstGeom prst="rect">
+            <a:avLst/>
+          </a:prstGeom>
+          <a:noFill/>
+        </p:spPr>
+        <p:txBody>
+          <a:bodyPr wrap="square" lIns="0" rIns="0" tIns="0" bIns="0" anchor="t">
+            <a:spAutoFit/>
+          </a:bodyPr>
+          <a:lstStyle/>
+          <a:p>
+            <a:pPr algn="l">
+              <a:lnSpc>
+                <a:spcPct val="130000"/>
+              </a:lnSpc>
+            </a:pPr>
+            <a:r>
+              <a:rPr sz="2400" b="0">
+                <a:solidFill>
+                  <a:srgbClr val="3D3D3D"/>
+                </a:solidFill>
+                <a:latin typeface="Pretendard"/>
+                <a:ea typeface="Pretendard"/>
+                <a:cs typeface="Pretendard"/>
+              </a:rPr>
+              <a:t>SQL 로 질문하기 — 집계·조인·윈도 함수·CTE 를 익히고, DuckDB 와 Pandas 를 왕복하는 감각을 손에 익힙니다</a:t>
+            </a:r>
+          </a:p>
+        </p:txBody>
+      </p:sp>
+      <p:sp>
+        <p:nvSpPr>
+          <p:cNvPr id="8" name="Rounded Rectangle 7"/>
+          <p:cNvSpPr/>
+          <p:nvPr/>
+        </p:nvSpPr>
+        <p:spPr>
+          <a:xfrm>
+            <a:off x="1143000" y="5257800"/>
+            <a:ext cx="7772400" cy="819150"/>
+          </a:xfrm>
+          <a:prstGeom prst="roundRect">
+            <a:avLst>
+              <a:gd name="adj" fmla="val 6976"/>
+            </a:avLst>
+          </a:prstGeom>
+          <a:solidFill>
+            <a:srgbClr val="FAFBFD"/>
+          </a:solidFill>
+          <a:ln w="9525">
+            <a:solidFill>
+              <a:srgbClr val="DCE1E8"/>
+            </a:solidFill>
+          </a:ln>
+          <a:effectLst/>
+        </p:spPr>
+        <p:txBody>
+          <a:bodyPr rtlCol="0" anchor="ctr" wrap="square"/>
+          <a:lstStyle/>
+          <a:p>
+            <a:pPr algn="ctr"/>
+          </a:p>
+        </p:txBody>
+      </p:sp>
+      <p:sp>
+        <p:nvSpPr>
+          <p:cNvPr id="9" name="TextBox 8"/>
+          <p:cNvSpPr txBox="1"/>
+          <p:nvPr/>
+        </p:nvSpPr>
+        <p:spPr>
+          <a:xfrm>
+            <a:off x="1428750" y="5486400"/>
+            <a:ext cx="419100" cy="381000"/>
+          </a:xfrm>
+          <a:prstGeom prst="rect">
+            <a:avLst/>
+          </a:prstGeom>
+          <a:noFill/>
+        </p:spPr>
+        <p:txBody>
+          <a:bodyPr wrap="square" lIns="0" rIns="0" tIns="0" bIns="0" anchor="t">
+            <a:spAutoFit/>
+          </a:bodyPr>
+          <a:lstStyle/>
+          <a:p>
+            <a:pPr algn="l">
+              <a:lnSpc>
+                <a:spcPct val="100000"/>
+              </a:lnSpc>
+            </a:pPr>
+            <a:r>
+              <a:rPr sz="2475" b="1">
+                <a:solidFill>
+                  <a:srgbClr val="1E5BC6"/>
+                </a:solidFill>
+                <a:latin typeface="Pretendard"/>
+                <a:ea typeface="Pretendard"/>
+                <a:cs typeface="Pretendard"/>
+              </a:rPr>
+              <a:t>✓</a:t>
+            </a:r>
+          </a:p>
+        </p:txBody>
+      </p:sp>
+      <p:sp>
+        <p:nvSpPr>
+          <p:cNvPr id="10" name="TextBox 9"/>
+          <p:cNvSpPr txBox="1"/>
+          <p:nvPr/>
+        </p:nvSpPr>
+        <p:spPr>
+          <a:xfrm>
+            <a:off x="1905000" y="5486400"/>
+            <a:ext cx="6724650" cy="381000"/>
+          </a:xfrm>
+          <a:prstGeom prst="rect">
+            <a:avLst/>
+          </a:prstGeom>
+          <a:noFill/>
+        </p:spPr>
+        <p:txBody>
+          <a:bodyPr wrap="square" lIns="0" rIns="0" tIns="0" bIns="0" anchor="t">
+            <a:spAutoFit/>
+          </a:bodyPr>
+          <a:lstStyle/>
+          <a:p>
+            <a:pPr algn="l">
+              <a:lnSpc>
+                <a:spcPct val="100000"/>
+              </a:lnSpc>
+            </a:pPr>
+            <a:r>
+              <a:rPr sz="2475" b="1">
+                <a:solidFill>
+                  <a:srgbClr val="0D2B5E"/>
+                </a:solidFill>
+                <a:latin typeface="Pretendard"/>
+                <a:ea typeface="Pretendard"/>
+                <a:cs typeface="Pretendard"/>
+              </a:rPr>
+              <a:t>GROUP BY 집계와 파일 간 JOIN</a:t>
+            </a:r>
+          </a:p>
+        </p:txBody>
+      </p:sp>
+      <p:sp>
+        <p:nvSpPr>
+          <p:cNvPr id="11" name="Rounded Rectangle 10"/>
+          <p:cNvSpPr/>
+          <p:nvPr/>
+        </p:nvSpPr>
+        <p:spPr>
+          <a:xfrm>
+            <a:off x="9372600" y="5257800"/>
+            <a:ext cx="7772400" cy="819150"/>
+          </a:xfrm>
+          <a:prstGeom prst="roundRect">
+            <a:avLst>
+              <a:gd name="adj" fmla="val 6976"/>
+            </a:avLst>
+          </a:prstGeom>
+          <a:solidFill>
+            <a:srgbClr val="FAFBFD"/>
+          </a:solidFill>
+          <a:ln w="9525">
+            <a:solidFill>
+              <a:srgbClr val="DCE1E8"/>
+            </a:solidFill>
+          </a:ln>
+          <a:effectLst/>
+        </p:spPr>
+        <p:txBody>
+          <a:bodyPr rtlCol="0" anchor="ctr" wrap="square"/>
+          <a:lstStyle/>
+          <a:p>
+            <a:pPr algn="ctr"/>
+          </a:p>
+        </p:txBody>
+      </p:sp>
+      <p:sp>
+        <p:nvSpPr>
+          <p:cNvPr id="12" name="TextBox 11"/>
+          <p:cNvSpPr txBox="1"/>
+          <p:nvPr/>
+        </p:nvSpPr>
+        <p:spPr>
+          <a:xfrm>
+            <a:off x="9658350" y="5486400"/>
+            <a:ext cx="419100" cy="381000"/>
+          </a:xfrm>
+          <a:prstGeom prst="rect">
+            <a:avLst/>
+          </a:prstGeom>
+          <a:noFill/>
+        </p:spPr>
+        <p:txBody>
+          <a:bodyPr wrap="square" lIns="0" rIns="0" tIns="0" bIns="0" anchor="t">
+            <a:spAutoFit/>
+          </a:bodyPr>
+          <a:lstStyle/>
+          <a:p>
+            <a:pPr algn="l">
+              <a:lnSpc>
+                <a:spcPct val="100000"/>
+              </a:lnSpc>
+            </a:pPr>
+            <a:r>
+              <a:rPr sz="2475" b="1">
+                <a:solidFill>
+                  <a:srgbClr val="1E5BC6"/>
+                </a:solidFill>
+                <a:latin typeface="Pretendard"/>
+                <a:ea typeface="Pretendard"/>
+                <a:cs typeface="Pretendard"/>
+              </a:rPr>
+              <a:t>✓</a:t>
+            </a:r>
+          </a:p>
+        </p:txBody>
+      </p:sp>
+      <p:sp>
+        <p:nvSpPr>
+          <p:cNvPr id="13" name="TextBox 12"/>
+          <p:cNvSpPr txBox="1"/>
+          <p:nvPr/>
+        </p:nvSpPr>
+        <p:spPr>
+          <a:xfrm>
+            <a:off x="10134600" y="5486400"/>
+            <a:ext cx="6724650" cy="381000"/>
+          </a:xfrm>
+          <a:prstGeom prst="rect">
+            <a:avLst/>
+          </a:prstGeom>
+          <a:noFill/>
+        </p:spPr>
+        <p:txBody>
+          <a:bodyPr wrap="square" lIns="0" rIns="0" tIns="0" bIns="0" anchor="t">
+            <a:spAutoFit/>
+          </a:bodyPr>
+          <a:lstStyle/>
+          <a:p>
+            <a:pPr algn="l">
+              <a:lnSpc>
+                <a:spcPct val="100000"/>
+              </a:lnSpc>
+            </a:pPr>
+            <a:r>
+              <a:rPr sz="2475" b="1">
+                <a:solidFill>
+                  <a:srgbClr val="0D2B5E"/>
+                </a:solidFill>
+                <a:latin typeface="Pretendard"/>
+                <a:ea typeface="Pretendard"/>
+                <a:cs typeface="Pretendard"/>
+              </a:rPr>
+              <a:t>rank·누적 합계 — 윈도 함수</a:t>
+            </a:r>
+          </a:p>
+        </p:txBody>
+      </p:sp>
+      <p:sp>
+        <p:nvSpPr>
+          <p:cNvPr id="14" name="Rounded Rectangle 13"/>
+          <p:cNvSpPr/>
+          <p:nvPr/>
+        </p:nvSpPr>
+        <p:spPr>
+          <a:xfrm>
+            <a:off x="1143000" y="6286500"/>
+            <a:ext cx="7772400" cy="819150"/>
+          </a:xfrm>
+          <a:prstGeom prst="roundRect">
+            <a:avLst>
+              <a:gd name="adj" fmla="val 6976"/>
+            </a:avLst>
+          </a:prstGeom>
+          <a:solidFill>
+            <a:srgbClr val="FAFBFD"/>
+          </a:solidFill>
+          <a:ln w="9525">
+            <a:solidFill>
+              <a:srgbClr val="DCE1E8"/>
+            </a:solidFill>
+          </a:ln>
+          <a:effectLst/>
+        </p:spPr>
+        <p:txBody>
+          <a:bodyPr rtlCol="0" anchor="ctr" wrap="square"/>
+          <a:lstStyle/>
+          <a:p>
+            <a:pPr algn="ctr"/>
+          </a:p>
+        </p:txBody>
+      </p:sp>
+      <p:sp>
+        <p:nvSpPr>
+          <p:cNvPr id="15" name="TextBox 14"/>
+          <p:cNvSpPr txBox="1"/>
+          <p:nvPr/>
+        </p:nvSpPr>
+        <p:spPr>
+          <a:xfrm>
+            <a:off x="1428750" y="6515100"/>
+            <a:ext cx="419100" cy="381000"/>
+          </a:xfrm>
+          <a:prstGeom prst="rect">
+            <a:avLst/>
+          </a:prstGeom>
+          <a:noFill/>
+        </p:spPr>
+        <p:txBody>
+          <a:bodyPr wrap="square" lIns="0" rIns="0" tIns="0" bIns="0" anchor="t">
+            <a:spAutoFit/>
+          </a:bodyPr>
+          <a:lstStyle/>
+          <a:p>
+            <a:pPr algn="l">
+              <a:lnSpc>
+                <a:spcPct val="100000"/>
+              </a:lnSpc>
+            </a:pPr>
+            <a:r>
+              <a:rPr sz="2475" b="1">
+                <a:solidFill>
+                  <a:srgbClr val="1E5BC6"/>
+                </a:solidFill>
+                <a:latin typeface="Pretendard"/>
+                <a:ea typeface="Pretendard"/>
+                <a:cs typeface="Pretendard"/>
+              </a:rPr>
+              <a:t>✓</a:t>
+            </a:r>
+          </a:p>
+        </p:txBody>
+      </p:sp>
+      <p:sp>
+        <p:nvSpPr>
+          <p:cNvPr id="16" name="TextBox 15"/>
+          <p:cNvSpPr txBox="1"/>
+          <p:nvPr/>
+        </p:nvSpPr>
+        <p:spPr>
+          <a:xfrm>
+            <a:off x="1905000" y="6515100"/>
+            <a:ext cx="6724650" cy="381000"/>
+          </a:xfrm>
+          <a:prstGeom prst="rect">
+            <a:avLst/>
+          </a:prstGeom>
+          <a:noFill/>
+        </p:spPr>
+        <p:txBody>
+          <a:bodyPr wrap="square" lIns="0" rIns="0" tIns="0" bIns="0" anchor="t">
+            <a:spAutoFit/>
+          </a:bodyPr>
+          <a:lstStyle/>
+          <a:p>
+            <a:pPr algn="l">
+              <a:lnSpc>
+                <a:spcPct val="100000"/>
+              </a:lnSpc>
+            </a:pPr>
+            <a:r>
+              <a:rPr sz="2475" b="1">
+                <a:solidFill>
+                  <a:srgbClr val="0D2B5E"/>
+                </a:solidFill>
+                <a:latin typeface="Pretendard"/>
+                <a:ea typeface="Pretendard"/>
+                <a:cs typeface="Pretendard"/>
+              </a:rPr>
+              <a:t>CTE 로 질의를 읽기 쉬운 단계로</a:t>
+            </a:r>
+          </a:p>
+        </p:txBody>
+      </p:sp>
+      <p:sp>
+        <p:nvSpPr>
+          <p:cNvPr id="17" name="Rounded Rectangle 16"/>
+          <p:cNvSpPr/>
+          <p:nvPr/>
+        </p:nvSpPr>
+        <p:spPr>
+          <a:xfrm>
+            <a:off x="9372600" y="6286500"/>
+            <a:ext cx="7772400" cy="819150"/>
+          </a:xfrm>
+          <a:prstGeom prst="roundRect">
+            <a:avLst>
+              <a:gd name="adj" fmla="val 6976"/>
+            </a:avLst>
+          </a:prstGeom>
+          <a:solidFill>
+            <a:srgbClr val="FAFBFD"/>
+          </a:solidFill>
+          <a:ln w="9525">
+            <a:solidFill>
+              <a:srgbClr val="DCE1E8"/>
+            </a:solidFill>
+          </a:ln>
+          <a:effectLst/>
+        </p:spPr>
+        <p:txBody>
+          <a:bodyPr rtlCol="0" anchor="ctr" wrap="square"/>
+          <a:lstStyle/>
+          <a:p>
+            <a:pPr algn="ctr"/>
+          </a:p>
+        </p:txBody>
+      </p:sp>
+      <p:sp>
+        <p:nvSpPr>
+          <p:cNvPr id="18" name="TextBox 17"/>
+          <p:cNvSpPr txBox="1"/>
+          <p:nvPr/>
+        </p:nvSpPr>
+        <p:spPr>
+          <a:xfrm>
+            <a:off x="9658350" y="6515100"/>
+            <a:ext cx="419100" cy="381000"/>
+          </a:xfrm>
+          <a:prstGeom prst="rect">
+            <a:avLst/>
+          </a:prstGeom>
+          <a:noFill/>
+        </p:spPr>
+        <p:txBody>
+          <a:bodyPr wrap="square" lIns="0" rIns="0" tIns="0" bIns="0" anchor="t">
+            <a:spAutoFit/>
+          </a:bodyPr>
+          <a:lstStyle/>
+          <a:p>
+            <a:pPr algn="l">
+              <a:lnSpc>
+                <a:spcPct val="100000"/>
+              </a:lnSpc>
+            </a:pPr>
+            <a:r>
+              <a:rPr sz="2475" b="1">
+                <a:solidFill>
+                  <a:srgbClr val="1E5BC6"/>
+                </a:solidFill>
+                <a:latin typeface="Pretendard"/>
+                <a:ea typeface="Pretendard"/>
+                <a:cs typeface="Pretendard"/>
+              </a:rPr>
+              <a:t>✓</a:t>
+            </a:r>
+          </a:p>
+        </p:txBody>
+      </p:sp>
+      <p:sp>
+        <p:nvSpPr>
+          <p:cNvPr id="19" name="TextBox 18"/>
+          <p:cNvSpPr txBox="1"/>
+          <p:nvPr/>
+        </p:nvSpPr>
+        <p:spPr>
+          <a:xfrm>
+            <a:off x="10134600" y="6515100"/>
+            <a:ext cx="6724650" cy="381000"/>
+          </a:xfrm>
+          <a:prstGeom prst="rect">
+            <a:avLst/>
+          </a:prstGeom>
+          <a:noFill/>
+        </p:spPr>
+        <p:txBody>
+          <a:bodyPr wrap="square" lIns="0" rIns="0" tIns="0" bIns="0" anchor="t">
+            <a:spAutoFit/>
+          </a:bodyPr>
+          <a:lstStyle/>
+          <a:p>
+            <a:pPr algn="l">
+              <a:lnSpc>
+                <a:spcPct val="100000"/>
+              </a:lnSpc>
+            </a:pPr>
+            <a:r>
+              <a:rPr sz="2475" b="1">
+                <a:solidFill>
+                  <a:srgbClr val="0D2B5E"/>
+                </a:solidFill>
+                <a:latin typeface="Pretendard"/>
+                <a:ea typeface="Pretendard"/>
+                <a:cs typeface="Pretendard"/>
+              </a:rPr>
+              <a:t>어떤 일은 SQL, 어떤 일은 Pandas</a:t>
+            </a:r>
+          </a:p>
+        </p:txBody>
+      </p:sp>
+      <p:sp>
+        <p:nvSpPr>
+          <p:cNvPr id="20" name="Rectangle 19"/>
+          <p:cNvSpPr/>
+          <p:nvPr/>
+        </p:nvSpPr>
+        <p:spPr>
+          <a:xfrm>
+            <a:off x="1143000" y="7715250"/>
+            <a:ext cx="47625" cy="819150"/>
+          </a:xfrm>
+          <a:prstGeom prst="rect">
+            <a:avLst/>
+          </a:prstGeom>
+          <a:solidFill>
+            <a:srgbClr val="1E5BC6"/>
+          </a:solidFill>
+          <a:ln>
+            <a:noFill/>
+          </a:ln>
+          <a:effectLst/>
+        </p:spPr>
+        <p:txBody>
+          <a:bodyPr rtlCol="0" anchor="ctr" wrap="square"/>
+          <a:lstStyle/>
+          <a:p>
+            <a:pPr algn="ctr"/>
+          </a:p>
+        </p:txBody>
+      </p:sp>
+      <p:sp>
+        <p:nvSpPr>
+          <p:cNvPr id="21" name="TextBox 20"/>
+          <p:cNvSpPr txBox="1"/>
+          <p:nvPr/>
+        </p:nvSpPr>
+        <p:spPr>
+          <a:xfrm>
+            <a:off x="1409700" y="7734300"/>
+            <a:ext cx="8572500" cy="304800"/>
+          </a:xfrm>
+          <a:prstGeom prst="rect">
+            <a:avLst/>
+          </a:prstGeom>
+          <a:noFill/>
+        </p:spPr>
+        <p:txBody>
+          <a:bodyPr wrap="square" lIns="0" rIns="0" tIns="0" bIns="0" anchor="t">
+            <a:spAutoFit/>
+          </a:bodyPr>
+          <a:lstStyle/>
+          <a:p>
+            <a:pPr algn="l">
+              <a:lnSpc>
+                <a:spcPct val="100000"/>
+              </a:lnSpc>
+            </a:pPr>
+            <a:r>
+              <a:rPr sz="1800" b="1" spc="140">
+                <a:solidFill>
+                  <a:srgbClr val="1E5BC6"/>
+                </a:solidFill>
+                <a:latin typeface="Pretendard"/>
+                <a:ea typeface="Pretendard"/>
+                <a:cs typeface="Pretendard"/>
+              </a:rPr>
+              <a:t>준비할 것</a:t>
+            </a:r>
+          </a:p>
+        </p:txBody>
+      </p:sp>
+      <p:sp>
+        <p:nvSpPr>
+          <p:cNvPr id="22" name="TextBox 21"/>
+          <p:cNvSpPr txBox="1"/>
+          <p:nvPr/>
+        </p:nvSpPr>
+        <p:spPr>
+          <a:xfrm>
+            <a:off x="1409700" y="8077200"/>
+            <a:ext cx="8572500" cy="400050"/>
+          </a:xfrm>
+          <a:prstGeom prst="rect">
+            <a:avLst/>
+          </a:prstGeom>
+          <a:noFill/>
+        </p:spPr>
+        <p:txBody>
+          <a:bodyPr wrap="square" lIns="0" rIns="0" tIns="0" bIns="0" anchor="t">
+            <a:spAutoFit/>
+          </a:bodyPr>
+          <a:lstStyle/>
+          <a:p>
+            <a:pPr algn="l">
+              <a:lnSpc>
+                <a:spcPct val="100000"/>
+              </a:lnSpc>
+            </a:pPr>
+            <a:r>
+              <a:rPr sz="2400" b="1">
+                <a:solidFill>
+                  <a:srgbClr val="0D2B5E"/>
+                </a:solidFill>
+                <a:latin typeface="Pretendard"/>
+                <a:ea typeface="Pretendard"/>
+                <a:cs typeface="Pretendard"/>
+              </a:rPr>
+              <a:t>파일 넷 — 없으면 3-4 실습점검</a:t>
             </a:r>
           </a:p>
         </p:txBody>
@@ -3598,7 +4406,7 @@
       <p:grpSpPr/>
       <p:sp>
         <p:nvSpPr>
-          <p:cNvPr id="2" name="Oval 1"/>
+          <p:cNvPr id="2" name="deckgen:decor"/>
           <p:cNvSpPr/>
           <p:nvPr/>
         </p:nvSpPr>
@@ -3628,7 +4436,7 @@
       </p:sp>
       <p:sp>
         <p:nvSpPr>
-          <p:cNvPr id="3" name="Oval 2"/>
+          <p:cNvPr id="3" name="deckgen:decor"/>
           <p:cNvSpPr/>
           <p:nvPr/>
         </p:nvSpPr>
@@ -3658,7 +4466,7 @@
       </p:sp>
       <p:sp>
         <p:nvSpPr>
-          <p:cNvPr id="4" name="Oval 3"/>
+          <p:cNvPr id="4" name="deckgen:decor"/>
           <p:cNvSpPr/>
           <p:nvPr/>
         </p:nvSpPr>
@@ -3939,7 +4747,7 @@
                 <a:ea typeface="Pretendard"/>
                 <a:cs typeface="Pretendard"/>
               </a:rPr>
-              <a:t>파일 크기 배율과 질의 속도 배율을 옆 사람과 비교한다</a:t>
+              <a:t>파일 크기 배율과 질의 속도 배율을 채팅에 올려 비교한다</a:t>
             </a:r>
           </a:p>
         </p:txBody>
@@ -4377,7 +5185,7 @@
                 <a:ea typeface="Pretendard"/>
                 <a:cs typeface="Pretendard"/>
               </a:rPr>
-              <a:t>3-4 에 쓸 events.parquet 와 3-1·3-2 파일이 있는지 확인한다</a:t>
+              <a:t>3-4 가 받을 파일 넷이 있는지 ls 로 확인한다</a:t>
             </a:r>
           </a:p>
         </p:txBody>
@@ -4589,7 +5397,7 @@
       <p:grpSpPr/>
       <p:sp>
         <p:nvSpPr>
-          <p:cNvPr id="2" name="Oval 1"/>
+          <p:cNvPr id="2" name="deckgen:decor"/>
           <p:cNvSpPr/>
           <p:nvPr/>
         </p:nvSpPr>
@@ -4619,7 +5427,7 @@
       </p:sp>
       <p:sp>
         <p:nvSpPr>
-          <p:cNvPr id="3" name="Oval 2"/>
+          <p:cNvPr id="3" name="deckgen:decor"/>
           <p:cNvSpPr/>
           <p:nvPr/>
         </p:nvSpPr>
@@ -4649,7 +5457,7 @@
       </p:sp>
       <p:sp>
         <p:nvSpPr>
-          <p:cNvPr id="4" name="Oval 3"/>
+          <p:cNvPr id="4" name="deckgen:decor"/>
           <p:cNvSpPr/>
           <p:nvPr/>
         </p:nvSpPr>
@@ -4754,7 +5562,7 @@
                 <a:ea typeface="Pretendard"/>
                 <a:cs typeface="Pretendard"/>
               </a:rPr>
-              <a:t>오늘 잰 배율 두 가지 — 옆 사람과 비교</a:t>
+              <a:t>오늘 잰 배율 두 가지 — 채팅에 올려 비교</a:t>
             </a:r>
           </a:p>
         </p:txBody>
@@ -4855,7 +5663,7 @@
       </p:sp>
       <p:sp>
         <p:nvSpPr>
-          <p:cNvPr id="10" name="TextBox 9"/>
+          <p:cNvPr id="10" name="deckgen:ornament"/>
           <p:cNvSpPr txBox="1"/>
           <p:nvPr/>
         </p:nvSpPr>
@@ -4951,7 +5759,7 @@
                 <a:ea typeface="Pretendard"/>
                 <a:cs typeface="Pretendard"/>
               </a:rPr>
-              <a:t>events.csv 와 events.parquet(zstd)</a:t>
+              <a:t>노트 실측 41M → 9.8M(4.1배)</a:t>
             </a:r>
           </a:p>
           <a:p>
@@ -4969,7 +5777,7 @@
                 <a:ea typeface="Pretendard"/>
                 <a:cs typeface="Pretendard"/>
               </a:rPr>
-              <a:t>getsize 로 잰 MB 와 배율</a:t>
+              <a:t>본인 MB 와 배율을 채팅에</a:t>
             </a:r>
           </a:p>
         </p:txBody>
@@ -5040,7 +5848,7 @@
       </p:sp>
       <p:sp>
         <p:nvSpPr>
-          <p:cNvPr id="14" name="TextBox 13"/>
+          <p:cNvPr id="14" name="deckgen:ornament"/>
           <p:cNvSpPr txBox="1"/>
           <p:nvPr/>
         </p:nvSpPr>
@@ -5136,7 +5944,7 @@
                 <a:ea typeface="Pretendard"/>
                 <a:cs typeface="Pretendard"/>
               </a:rPr>
-              <a:t>같은 집계 질의를 CSV·Parquet 에</a:t>
+              <a:t>노트 실측 30~60배(흔들림)</a:t>
             </a:r>
           </a:p>
           <a:p>
@@ -5154,7 +5962,7 @@
                 <a:ea typeface="Pretendard"/>
                 <a:cs typeface="Pretendard"/>
               </a:rPr>
-              <a:t>bench 3회 평균으로 잰 초와 배율</a:t>
+              <a:t>본인 bench 3회 평균을 채팅에</a:t>
             </a:r>
           </a:p>
         </p:txBody>
@@ -5362,7 +6170,7 @@
       <p:grpSpPr/>
       <p:sp>
         <p:nvSpPr>
-          <p:cNvPr id="2" name="Oval 1"/>
+          <p:cNvPr id="2" name="deckgen:decor"/>
           <p:cNvSpPr/>
           <p:nvPr/>
         </p:nvSpPr>
@@ -5392,7 +6200,7 @@
       </p:sp>
       <p:sp>
         <p:nvSpPr>
-          <p:cNvPr id="3" name="Oval 2"/>
+          <p:cNvPr id="3" name="deckgen:decor"/>
           <p:cNvSpPr/>
           <p:nvPr/>
         </p:nvSpPr>
@@ -5422,7 +6230,7 @@
       </p:sp>
       <p:sp>
         <p:nvSpPr>
-          <p:cNvPr id="4" name="Oval 3"/>
+          <p:cNvPr id="4" name="deckgen:decor"/>
           <p:cNvSpPr/>
           <p:nvPr/>
         </p:nvSpPr>
@@ -6749,7 +7557,7 @@
                 <a:ea typeface="Pretendard"/>
                 <a:cs typeface="Pretendard"/>
               </a:rPr>
-              <a:t>COPY (…) TO 'out.parquet' (COMPRESSION zstd)</a:t>
+              <a:t>COPY (…) TO 'out.parquet' (FORMAT parquet, COMPRESSION zstd)</a:t>
             </a:r>
           </a:p>
         </p:txBody>
@@ -7077,7 +7885,7 @@
       <p:grpSpPr/>
       <p:sp>
         <p:nvSpPr>
-          <p:cNvPr id="2" name="Oval 1"/>
+          <p:cNvPr id="2" name="deckgen:decor"/>
           <p:cNvSpPr/>
           <p:nvPr/>
         </p:nvSpPr>
@@ -7107,7 +7915,7 @@
       </p:sp>
       <p:sp>
         <p:nvSpPr>
-          <p:cNvPr id="3" name="Oval 2"/>
+          <p:cNvPr id="3" name="deckgen:decor"/>
           <p:cNvSpPr/>
           <p:nvPr/>
         </p:nvSpPr>
@@ -7137,7 +7945,7 @@
       </p:sp>
       <p:sp>
         <p:nvSpPr>
-          <p:cNvPr id="4" name="Oval 3"/>
+          <p:cNvPr id="4" name="deckgen:decor"/>
           <p:cNvSpPr/>
           <p:nvPr/>
         </p:nvSpPr>
@@ -8002,7 +8810,7 @@
                 <a:ea typeface="Pretendard"/>
                 <a:cs typeface="Pretendard"/>
               </a:rPr>
-              <a:t>.df() 로 DataFrame 을 받고, 반대로 DataFrame 을 SQL 에서 참조했다</a:t>
+              <a:t>.df() 로 결과를 받고, DataFrame 을 SQL 에서 참조했다</a:t>
             </a:r>
           </a:p>
         </p:txBody>
@@ -8294,7 +9102,7 @@
                 <a:ea typeface="Pretendard"/>
                 <a:cs typeface="Pretendard"/>
               </a:rPr>
-              <a:t>한 열만 vs 전부 읽기로 열 지향의 이유를 확인했다</a:t>
+              <a:t>한 열·다섯 열 비교로 열 지향의 이유와 count(*) 함정을 봤다</a:t>
             </a:r>
           </a:p>
         </p:txBody>
@@ -8577,7 +9385,7 @@
       <p:grpSpPr/>
       <p:sp>
         <p:nvSpPr>
-          <p:cNvPr id="2" name="Oval 1"/>
+          <p:cNvPr id="2" name="deckgen:decor"/>
           <p:cNvSpPr/>
           <p:nvPr/>
         </p:nvSpPr>
@@ -8607,7 +9415,7 @@
       </p:sp>
       <p:sp>
         <p:nvSpPr>
-          <p:cNvPr id="3" name="Oval 2"/>
+          <p:cNvPr id="3" name="deckgen:decor"/>
           <p:cNvSpPr/>
           <p:nvPr/>
         </p:nvSpPr>
@@ -8637,7 +9445,7 @@
       </p:sp>
       <p:sp>
         <p:nvSpPr>
-          <p:cNvPr id="4" name="Oval 3"/>
+          <p:cNvPr id="4" name="deckgen:decor"/>
           <p:cNvSpPr/>
           <p:nvPr/>
         </p:nvSpPr>
@@ -9915,7 +10723,7 @@
                 <a:ea typeface="Pretendard"/>
                 <a:cs typeface="Pretendard"/>
               </a:rPr>
-              <a:t>Directory is not empty</a:t>
+              <a:t>Directory is not empty!</a:t>
             </a:r>
           </a:p>
         </p:txBody>
@@ -10083,7 +10891,7 @@
                 <a:ea typeface="Pretendard"/>
                 <a:cs typeface="Pretendard"/>
               </a:rPr>
-              <a:t>OVERWRITE_OR_IGNORE</a:t>
+              <a:t>OVERWRITE_OR_IGNORE · OVERWRITE</a:t>
             </a:r>
           </a:p>
           <a:p>
@@ -10279,7 +11087,7 @@
       <p:grpSpPr/>
       <p:sp>
         <p:nvSpPr>
-          <p:cNvPr id="2" name="Oval 1"/>
+          <p:cNvPr id="2" name="deckgen:decor"/>
           <p:cNvSpPr/>
           <p:nvPr/>
         </p:nvSpPr>
@@ -10309,7 +11117,7 @@
       </p:sp>
       <p:sp>
         <p:nvSpPr>
-          <p:cNvPr id="3" name="Oval 2"/>
+          <p:cNvPr id="3" name="deckgen:decor"/>
           <p:cNvSpPr/>
           <p:nvPr/>
         </p:nvSpPr>
@@ -10339,7 +11147,7 @@
       </p:sp>
       <p:sp>
         <p:nvSpPr>
-          <p:cNvPr id="4" name="Oval 3"/>
+          <p:cNvPr id="4" name="deckgen:decor"/>
           <p:cNvSpPr/>
           <p:nvPr/>
         </p:nvSpPr>
@@ -11399,7 +12207,7 @@
       <p:grpSpPr/>
       <p:sp>
         <p:nvSpPr>
-          <p:cNvPr id="2" name="Oval 1"/>
+          <p:cNvPr id="2" name="deckgen:decor"/>
           <p:cNvSpPr/>
           <p:nvPr/>
         </p:nvSpPr>
@@ -11429,7 +12237,7 @@
       </p:sp>
       <p:sp>
         <p:nvSpPr>
-          <p:cNvPr id="3" name="Oval 2"/>
+          <p:cNvPr id="3" name="deckgen:decor"/>
           <p:cNvSpPr/>
           <p:nvPr/>
         </p:nvSpPr>
@@ -11459,7 +12267,7 @@
       </p:sp>
       <p:sp>
         <p:nvSpPr>
-          <p:cNvPr id="4" name="Oval 3"/>
+          <p:cNvPr id="4" name="deckgen:decor"/>
           <p:cNvSpPr/>
           <p:nvPr/>
         </p:nvSpPr>
@@ -11523,7 +12331,7 @@
                 <a:ea typeface="Pretendard"/>
                 <a:cs typeface="Pretendard"/>
               </a:rPr>
-              <a:t>다음 회차 예고</a:t>
+              <a:t>다음 차시(3-4) 준비</a:t>
             </a:r>
           </a:p>
         </p:txBody>
@@ -11564,7 +12372,7 @@
                 <a:ea typeface="Pretendard"/>
                 <a:cs typeface="Pretendard"/>
               </a:rPr>
-              <a:t>3-4 · DuckDB를 이용한 데이터 분석</a:t>
+              <a:t>파일 넷 — 지금 ls 로 확인</a:t>
             </a:r>
           </a:p>
         </p:txBody>
@@ -11601,18 +12409,306 @@
       </p:sp>
       <p:sp>
         <p:nvSpPr>
-          <p:cNvPr id="8" name="Rounded Rectangle 7"/>
-          <p:cNvSpPr/>
-          <p:nvPr/>
-        </p:nvSpPr>
-        <p:spPr>
-          <a:xfrm>
-            <a:off x="1143000" y="3429000"/>
-            <a:ext cx="3714750" cy="2476500"/>
+          <p:cNvPr id="8" name="Rectangle 7"/>
+          <p:cNvSpPr/>
+          <p:nvPr/>
+        </p:nvSpPr>
+        <p:spPr>
+          <a:xfrm>
+            <a:off x="1143000" y="2781300"/>
+            <a:ext cx="6682740" cy="590550"/>
+          </a:xfrm>
+          <a:prstGeom prst="rect">
+            <a:avLst/>
+          </a:prstGeom>
+          <a:solidFill>
+            <a:srgbClr val="0D2B5E"/>
+          </a:solidFill>
+          <a:ln>
+            <a:noFill/>
+          </a:ln>
+          <a:effectLst/>
+        </p:spPr>
+        <p:txBody>
+          <a:bodyPr rtlCol="0" anchor="ctr" wrap="square"/>
+          <a:lstStyle/>
+          <a:p>
+            <a:pPr algn="ctr"/>
+          </a:p>
+        </p:txBody>
+      </p:sp>
+      <p:sp>
+        <p:nvSpPr>
+          <p:cNvPr id="9" name="TextBox 8"/>
+          <p:cNvSpPr txBox="1"/>
+          <p:nvPr/>
+        </p:nvSpPr>
+        <p:spPr>
+          <a:xfrm>
+            <a:off x="1143000" y="2781300"/>
+            <a:ext cx="6682740" cy="590550"/>
+          </a:xfrm>
+          <a:prstGeom prst="rect">
+            <a:avLst/>
+          </a:prstGeom>
+          <a:noFill/>
+        </p:spPr>
+        <p:txBody>
+          <a:bodyPr wrap="square" lIns="0" rIns="0" tIns="0" bIns="0" anchor="ctr">
+            <a:spAutoFit/>
+          </a:bodyPr>
+          <a:lstStyle/>
+          <a:p>
+            <a:pPr algn="ctr">
+              <a:lnSpc>
+                <a:spcPct val="100000"/>
+              </a:lnSpc>
+            </a:pPr>
+            <a:r>
+              <a:rPr sz="2025" b="1">
+                <a:solidFill>
+                  <a:srgbClr val="FFFFFF"/>
+                </a:solidFill>
+                <a:latin typeface="Pretendard"/>
+                <a:ea typeface="Pretendard"/>
+                <a:cs typeface="Pretendard"/>
+              </a:rPr>
+              <a:t>파일</a:t>
+            </a:r>
+          </a:p>
+        </p:txBody>
+      </p:sp>
+      <p:sp>
+        <p:nvSpPr>
+          <p:cNvPr id="10" name="Rectangle 9"/>
+          <p:cNvSpPr/>
+          <p:nvPr/>
+        </p:nvSpPr>
+        <p:spPr>
+          <a:xfrm>
+            <a:off x="7863840" y="2781300"/>
+            <a:ext cx="2842260" cy="590550"/>
+          </a:xfrm>
+          <a:prstGeom prst="rect">
+            <a:avLst/>
+          </a:prstGeom>
+          <a:solidFill>
+            <a:srgbClr val="1E5BC6"/>
+          </a:solidFill>
+          <a:ln>
+            <a:noFill/>
+          </a:ln>
+          <a:effectLst/>
+        </p:spPr>
+        <p:txBody>
+          <a:bodyPr rtlCol="0" anchor="ctr" wrap="square"/>
+          <a:lstStyle/>
+          <a:p>
+            <a:pPr algn="ctr"/>
+          </a:p>
+        </p:txBody>
+      </p:sp>
+      <p:sp>
+        <p:nvSpPr>
+          <p:cNvPr id="11" name="TextBox 10"/>
+          <p:cNvSpPr txBox="1"/>
+          <p:nvPr/>
+        </p:nvSpPr>
+        <p:spPr>
+          <a:xfrm>
+            <a:off x="7863840" y="2781300"/>
+            <a:ext cx="2842260" cy="590550"/>
+          </a:xfrm>
+          <a:prstGeom prst="rect">
+            <a:avLst/>
+          </a:prstGeom>
+          <a:noFill/>
+        </p:spPr>
+        <p:txBody>
+          <a:bodyPr wrap="square" lIns="0" rIns="0" tIns="0" bIns="0" anchor="ctr">
+            <a:spAutoFit/>
+          </a:bodyPr>
+          <a:lstStyle/>
+          <a:p>
+            <a:pPr algn="ctr">
+              <a:lnSpc>
+                <a:spcPct val="100000"/>
+              </a:lnSpc>
+            </a:pPr>
+            <a:r>
+              <a:rPr sz="2025" b="1">
+                <a:solidFill>
+                  <a:srgbClr val="FFFFFF"/>
+                </a:solidFill>
+                <a:latin typeface="Pretendard"/>
+                <a:ea typeface="Pretendard"/>
+                <a:cs typeface="Pretendard"/>
+              </a:rPr>
+              <a:t>크기</a:t>
+            </a:r>
+          </a:p>
+        </p:txBody>
+      </p:sp>
+      <p:sp>
+        <p:nvSpPr>
+          <p:cNvPr id="12" name="Rectangle 11"/>
+          <p:cNvSpPr/>
+          <p:nvPr/>
+        </p:nvSpPr>
+        <p:spPr>
+          <a:xfrm>
+            <a:off x="10744200" y="2781300"/>
+            <a:ext cx="6400800" cy="590550"/>
+          </a:xfrm>
+          <a:prstGeom prst="rect">
+            <a:avLst/>
+          </a:prstGeom>
+          <a:solidFill>
+            <a:srgbClr val="1E5BC6"/>
+          </a:solidFill>
+          <a:ln>
+            <a:noFill/>
+          </a:ln>
+          <a:effectLst/>
+        </p:spPr>
+        <p:txBody>
+          <a:bodyPr rtlCol="0" anchor="ctr" wrap="square"/>
+          <a:lstStyle/>
+          <a:p>
+            <a:pPr algn="ctr"/>
+          </a:p>
+        </p:txBody>
+      </p:sp>
+      <p:sp>
+        <p:nvSpPr>
+          <p:cNvPr id="13" name="TextBox 12"/>
+          <p:cNvSpPr txBox="1"/>
+          <p:nvPr/>
+        </p:nvSpPr>
+        <p:spPr>
+          <a:xfrm>
+            <a:off x="10744200" y="2781300"/>
+            <a:ext cx="6400800" cy="590550"/>
+          </a:xfrm>
+          <a:prstGeom prst="rect">
+            <a:avLst/>
+          </a:prstGeom>
+          <a:noFill/>
+        </p:spPr>
+        <p:txBody>
+          <a:bodyPr wrap="square" lIns="0" rIns="0" tIns="0" bIns="0" anchor="ctr">
+            <a:spAutoFit/>
+          </a:bodyPr>
+          <a:lstStyle/>
+          <a:p>
+            <a:pPr algn="ctr">
+              <a:lnSpc>
+                <a:spcPct val="100000"/>
+              </a:lnSpc>
+            </a:pPr>
+            <a:r>
+              <a:rPr sz="2025" b="1">
+                <a:solidFill>
+                  <a:srgbClr val="FFFFFF"/>
+                </a:solidFill>
+                <a:latin typeface="Pretendard"/>
+                <a:ea typeface="Pretendard"/>
+                <a:cs typeface="Pretendard"/>
+              </a:rPr>
+              <a:t>만든 차시</a:t>
+            </a:r>
+          </a:p>
+        </p:txBody>
+      </p:sp>
+      <p:sp>
+        <p:nvSpPr>
+          <p:cNvPr id="14" name="Rounded Rectangle 13"/>
+          <p:cNvSpPr/>
+          <p:nvPr/>
+        </p:nvSpPr>
+        <p:spPr>
+          <a:xfrm>
+            <a:off x="1143000" y="3448050"/>
+            <a:ext cx="6682740" cy="647700"/>
           </a:xfrm>
           <a:prstGeom prst="roundRect">
             <a:avLst>
-              <a:gd name="adj" fmla="val 1923"/>
+              <a:gd name="adj" fmla="val 5882"/>
+            </a:avLst>
+          </a:prstGeom>
+          <a:solidFill>
+            <a:srgbClr val="EDF3FD"/>
+          </a:solidFill>
+          <a:ln w="9525">
+            <a:solidFill>
+              <a:srgbClr val="BFD3F5"/>
+            </a:solidFill>
+          </a:ln>
+          <a:effectLst/>
+        </p:spPr>
+        <p:txBody>
+          <a:bodyPr rtlCol="0" anchor="ctr" wrap="square"/>
+          <a:lstStyle/>
+          <a:p>
+            <a:pPr algn="ctr"/>
+          </a:p>
+        </p:txBody>
+      </p:sp>
+      <p:sp>
+        <p:nvSpPr>
+          <p:cNvPr id="15" name="TextBox 14"/>
+          <p:cNvSpPr txBox="1"/>
+          <p:nvPr/>
+        </p:nvSpPr>
+        <p:spPr>
+          <a:xfrm>
+            <a:off x="1238250" y="3448050"/>
+            <a:ext cx="6492240" cy="647700"/>
+          </a:xfrm>
+          <a:prstGeom prst="rect">
+            <a:avLst/>
+          </a:prstGeom>
+          <a:noFill/>
+        </p:spPr>
+        <p:txBody>
+          <a:bodyPr wrap="square" lIns="0" rIns="0" tIns="0" bIns="0" anchor="ctr">
+            <a:spAutoFit/>
+          </a:bodyPr>
+          <a:lstStyle/>
+          <a:p>
+            <a:pPr algn="l">
+              <a:lnSpc>
+                <a:spcPct val="115000"/>
+              </a:lnSpc>
+            </a:pPr>
+            <a:r>
+              <a:rPr sz="1875" b="1">
+                <a:solidFill>
+                  <a:srgbClr val="0D2B5E"/>
+                </a:solidFill>
+                <a:latin typeface="Pretendard"/>
+                <a:ea typeface="Pretendard"/>
+                <a:cs typeface="Pretendard"/>
+              </a:rPr>
+              <a:t>events.parquet</a:t>
+            </a:r>
+          </a:p>
+        </p:txBody>
+      </p:sp>
+      <p:sp>
+        <p:nvSpPr>
+          <p:cNvPr id="16" name="Rounded Rectangle 15"/>
+          <p:cNvSpPr/>
+          <p:nvPr/>
+        </p:nvSpPr>
+        <p:spPr>
+          <a:xfrm>
+            <a:off x="7863840" y="3448050"/>
+            <a:ext cx="2842260" cy="647700"/>
+          </a:xfrm>
+          <a:prstGeom prst="roundRect">
+            <a:avLst>
+              <a:gd name="adj" fmla="val 5882"/>
             </a:avLst>
           </a:prstGeom>
           <a:solidFill>
@@ -11635,85 +12731,14 @@
       </p:sp>
       <p:sp>
         <p:nvSpPr>
-          <p:cNvPr id="9" name="Rectangle 8"/>
-          <p:cNvSpPr/>
-          <p:nvPr/>
-        </p:nvSpPr>
-        <p:spPr>
-          <a:xfrm>
-            <a:off x="1143000" y="3429000"/>
-            <a:ext cx="3714750" cy="47625"/>
-          </a:xfrm>
-          <a:prstGeom prst="rect">
-            <a:avLst/>
-          </a:prstGeom>
-          <a:solidFill>
-            <a:srgbClr val="1E5BC6"/>
-          </a:solidFill>
-          <a:ln>
-            <a:noFill/>
-          </a:ln>
-          <a:effectLst/>
-        </p:spPr>
-        <p:txBody>
-          <a:bodyPr rtlCol="0" anchor="ctr" wrap="square"/>
-          <a:lstStyle/>
-          <a:p>
-            <a:pPr algn="ctr"/>
-          </a:p>
-        </p:txBody>
-      </p:sp>
-      <p:sp>
-        <p:nvSpPr>
-          <p:cNvPr id="10" name="TextBox 9"/>
+          <p:cNvPr id="17" name="TextBox 16"/>
           <p:cNvSpPr txBox="1"/>
           <p:nvPr/>
         </p:nvSpPr>
         <p:spPr>
           <a:xfrm>
-            <a:off x="4000500" y="3638550"/>
-            <a:ext cx="590550" cy="400050"/>
-          </a:xfrm>
-          <a:prstGeom prst="rect">
-            <a:avLst/>
-          </a:prstGeom>
-          <a:noFill/>
-        </p:spPr>
-        <p:txBody>
-          <a:bodyPr wrap="square" lIns="0" rIns="0" tIns="0" bIns="0" anchor="t">
-            <a:spAutoFit/>
-          </a:bodyPr>
-          <a:lstStyle/>
-          <a:p>
-            <a:pPr algn="r">
-              <a:lnSpc>
-                <a:spcPct val="100000"/>
-              </a:lnSpc>
-            </a:pPr>
-            <a:r>
-              <a:rPr sz="2550" b="1">
-                <a:solidFill>
-                  <a:srgbClr val="E4EBF4"/>
-                </a:solidFill>
-                <a:latin typeface="Pretendard"/>
-                <a:ea typeface="Pretendard"/>
-                <a:cs typeface="Pretendard"/>
-              </a:rPr>
-              <a:t>01</a:t>
-            </a:r>
-          </a:p>
-        </p:txBody>
-      </p:sp>
-      <p:sp>
-        <p:nvSpPr>
-          <p:cNvPr id="11" name="TextBox 10"/>
-          <p:cNvSpPr txBox="1"/>
-          <p:nvPr/>
-        </p:nvSpPr>
-        <p:spPr>
-          <a:xfrm>
-            <a:off x="1466850" y="3752850"/>
-            <a:ext cx="3067050" cy="1828800"/>
+            <a:off x="7959090" y="3448050"/>
+            <a:ext cx="2651760" cy="647700"/>
           </a:xfrm>
           <a:prstGeom prst="rect">
             <a:avLst/>
@@ -11726,34 +12751,13 @@
           </a:bodyPr>
           <a:lstStyle/>
           <a:p>
-            <a:pPr>
+            <a:pPr algn="ctr">
               <a:lnSpc>
                 <a:spcPct val="115000"/>
               </a:lnSpc>
             </a:pPr>
             <a:r>
-              <a:rPr sz="2700" b="1">
-                <a:solidFill>
-                  <a:srgbClr val="0D2B5E"/>
-                </a:solidFill>
-                <a:latin typeface="Pretendard"/>
-                <a:ea typeface="Pretendard"/>
-                <a:cs typeface="Pretendard"/>
-              </a:rPr>
-              <a:t>이론 1H</a:t>
-            </a:r>
-          </a:p>
-          <a:p>
-            <a:pPr>
-              <a:lnSpc>
-                <a:spcPct val="146000"/>
-              </a:lnSpc>
-              <a:spcBef>
-                <a:spcPts val="1050"/>
-              </a:spcBef>
-            </a:pPr>
-            <a:r>
-              <a:rPr sz="2025" b="0">
+              <a:rPr sz="1875" b="0">
                 <a:solidFill>
                   <a:srgbClr val="3D3D3D"/>
                 </a:solidFill>
@@ -11761,228 +12765,25 @@
                 <a:ea typeface="Pretendard"/>
                 <a:cs typeface="Pretendard"/>
               </a:rPr>
-              <a:t>SQL 분석 문법</a:t>
-            </a:r>
-          </a:p>
-          <a:p>
-            <a:pPr>
-              <a:lnSpc>
-                <a:spcPct val="146000"/>
-              </a:lnSpc>
-            </a:pPr>
-            <a:r>
-              <a:rPr sz="2025" b="0">
-                <a:solidFill>
-                  <a:srgbClr val="3D3D3D"/>
-                </a:solidFill>
-                <a:latin typeface="Pretendard"/>
-                <a:ea typeface="Pretendard"/>
-                <a:cs typeface="Pretendard"/>
-              </a:rPr>
-              <a:t>집계·윈도·CTE</a:t>
-            </a:r>
-          </a:p>
-        </p:txBody>
-      </p:sp>
-      <p:sp>
-        <p:nvSpPr>
-          <p:cNvPr id="12" name="Rounded Rectangle 11"/>
-          <p:cNvSpPr/>
-          <p:nvPr/>
-        </p:nvSpPr>
-        <p:spPr>
-          <a:xfrm>
-            <a:off x="5238750" y="3429000"/>
-            <a:ext cx="3714750" cy="2476500"/>
+              <a:t>9.8M</a:t>
+            </a:r>
+          </a:p>
+        </p:txBody>
+      </p:sp>
+      <p:sp>
+        <p:nvSpPr>
+          <p:cNvPr id="18" name="Rounded Rectangle 17"/>
+          <p:cNvSpPr/>
+          <p:nvPr/>
+        </p:nvSpPr>
+        <p:spPr>
+          <a:xfrm>
+            <a:off x="10744200" y="3448050"/>
+            <a:ext cx="6400800" cy="647700"/>
           </a:xfrm>
           <a:prstGeom prst="roundRect">
             <a:avLst>
-              <a:gd name="adj" fmla="val 1923"/>
-            </a:avLst>
-          </a:prstGeom>
-          <a:solidFill>
-            <a:srgbClr val="0D2B5E"/>
-          </a:solidFill>
-          <a:ln w="9525">
-            <a:solidFill>
-              <a:srgbClr val="0D2B5E"/>
-            </a:solidFill>
-          </a:ln>
-          <a:effectLst/>
-        </p:spPr>
-        <p:txBody>
-          <a:bodyPr rtlCol="0" anchor="ctr" wrap="square"/>
-          <a:lstStyle/>
-          <a:p>
-            <a:pPr algn="ctr"/>
-          </a:p>
-        </p:txBody>
-      </p:sp>
-      <p:sp>
-        <p:nvSpPr>
-          <p:cNvPr id="13" name="Rectangle 12"/>
-          <p:cNvSpPr/>
-          <p:nvPr/>
-        </p:nvSpPr>
-        <p:spPr>
-          <a:xfrm>
-            <a:off x="5238750" y="3429000"/>
-            <a:ext cx="3714750" cy="47625"/>
-          </a:xfrm>
-          <a:prstGeom prst="rect">
-            <a:avLst/>
-          </a:prstGeom>
-          <a:solidFill>
-            <a:srgbClr val="1E5BC6"/>
-          </a:solidFill>
-          <a:ln>
-            <a:noFill/>
-          </a:ln>
-          <a:effectLst/>
-        </p:spPr>
-        <p:txBody>
-          <a:bodyPr rtlCol="0" anchor="ctr" wrap="square"/>
-          <a:lstStyle/>
-          <a:p>
-            <a:pPr algn="ctr"/>
-          </a:p>
-        </p:txBody>
-      </p:sp>
-      <p:sp>
-        <p:nvSpPr>
-          <p:cNvPr id="14" name="TextBox 13"/>
-          <p:cNvSpPr txBox="1"/>
-          <p:nvPr/>
-        </p:nvSpPr>
-        <p:spPr>
-          <a:xfrm>
-            <a:off x="8096250" y="3638550"/>
-            <a:ext cx="590550" cy="400050"/>
-          </a:xfrm>
-          <a:prstGeom prst="rect">
-            <a:avLst/>
-          </a:prstGeom>
-          <a:noFill/>
-        </p:spPr>
-        <p:txBody>
-          <a:bodyPr wrap="square" lIns="0" rIns="0" tIns="0" bIns="0" anchor="t">
-            <a:spAutoFit/>
-          </a:bodyPr>
-          <a:lstStyle/>
-          <a:p>
-            <a:pPr algn="r">
-              <a:lnSpc>
-                <a:spcPct val="100000"/>
-              </a:lnSpc>
-            </a:pPr>
-            <a:r>
-              <a:rPr sz="2550" b="1">
-                <a:solidFill>
-                  <a:srgbClr val="3B4B7C"/>
-                </a:solidFill>
-                <a:latin typeface="Pretendard"/>
-                <a:ea typeface="Pretendard"/>
-                <a:cs typeface="Pretendard"/>
-              </a:rPr>
-              <a:t>02</a:t>
-            </a:r>
-          </a:p>
-        </p:txBody>
-      </p:sp>
-      <p:sp>
-        <p:nvSpPr>
-          <p:cNvPr id="15" name="TextBox 14"/>
-          <p:cNvSpPr txBox="1"/>
-          <p:nvPr/>
-        </p:nvSpPr>
-        <p:spPr>
-          <a:xfrm>
-            <a:off x="5562600" y="3752850"/>
-            <a:ext cx="3067050" cy="1828800"/>
-          </a:xfrm>
-          <a:prstGeom prst="rect">
-            <a:avLst/>
-          </a:prstGeom>
-          <a:noFill/>
-        </p:spPr>
-        <p:txBody>
-          <a:bodyPr wrap="square" lIns="0" rIns="0" tIns="0" bIns="0" anchor="ctr">
-            <a:spAutoFit/>
-          </a:bodyPr>
-          <a:lstStyle/>
-          <a:p>
-            <a:pPr>
-              <a:lnSpc>
-                <a:spcPct val="115000"/>
-              </a:lnSpc>
-            </a:pPr>
-            <a:r>
-              <a:rPr sz="2700" b="1">
-                <a:solidFill>
-                  <a:srgbClr val="FFFFFF"/>
-                </a:solidFill>
-                <a:latin typeface="Pretendard"/>
-                <a:ea typeface="Pretendard"/>
-                <a:cs typeface="Pretendard"/>
-              </a:rPr>
-              <a:t>실습 1.5H</a:t>
-            </a:r>
-          </a:p>
-          <a:p>
-            <a:pPr>
-              <a:lnSpc>
-                <a:spcPct val="146000"/>
-              </a:lnSpc>
-              <a:spcBef>
-                <a:spcPts val="1050"/>
-              </a:spcBef>
-            </a:pPr>
-            <a:r>
-              <a:rPr sz="2025" b="0">
-                <a:solidFill>
-                  <a:srgbClr val="D9E2F0"/>
-                </a:solidFill>
-                <a:latin typeface="Pretendard"/>
-                <a:ea typeface="Pretendard"/>
-                <a:cs typeface="Pretendard"/>
-              </a:rPr>
-              <a:t>집계·조인 분석</a:t>
-            </a:r>
-          </a:p>
-          <a:p>
-            <a:pPr>
-              <a:lnSpc>
-                <a:spcPct val="146000"/>
-              </a:lnSpc>
-            </a:pPr>
-            <a:r>
-              <a:rPr sz="2025" b="0">
-                <a:solidFill>
-                  <a:srgbClr val="D9E2F0"/>
-                </a:solidFill>
-                <a:latin typeface="Pretendard"/>
-                <a:ea typeface="Pretendard"/>
-                <a:cs typeface="Pretendard"/>
-              </a:rPr>
-              <a:t>윈도 함수와 CTE</a:t>
-            </a:r>
-          </a:p>
-        </p:txBody>
-      </p:sp>
-      <p:sp>
-        <p:nvSpPr>
-          <p:cNvPr id="16" name="Rounded Rectangle 15"/>
-          <p:cNvSpPr/>
-          <p:nvPr/>
-        </p:nvSpPr>
-        <p:spPr>
-          <a:xfrm>
-            <a:off x="9334500" y="3429000"/>
-            <a:ext cx="3714750" cy="2476500"/>
-          </a:xfrm>
-          <a:prstGeom prst="roundRect">
-            <a:avLst>
-              <a:gd name="adj" fmla="val 1923"/>
+              <a:gd name="adj" fmla="val 5882"/>
             </a:avLst>
           </a:prstGeom>
           <a:solidFill>
@@ -12005,85 +12806,14 @@
       </p:sp>
       <p:sp>
         <p:nvSpPr>
-          <p:cNvPr id="17" name="Rectangle 16"/>
-          <p:cNvSpPr/>
-          <p:nvPr/>
-        </p:nvSpPr>
-        <p:spPr>
-          <a:xfrm>
-            <a:off x="9334500" y="3429000"/>
-            <a:ext cx="3714750" cy="47625"/>
-          </a:xfrm>
-          <a:prstGeom prst="rect">
-            <a:avLst/>
-          </a:prstGeom>
-          <a:solidFill>
-            <a:srgbClr val="1E5BC6"/>
-          </a:solidFill>
-          <a:ln>
-            <a:noFill/>
-          </a:ln>
-          <a:effectLst/>
-        </p:spPr>
-        <p:txBody>
-          <a:bodyPr rtlCol="0" anchor="ctr" wrap="square"/>
-          <a:lstStyle/>
-          <a:p>
-            <a:pPr algn="ctr"/>
-          </a:p>
-        </p:txBody>
-      </p:sp>
-      <p:sp>
-        <p:nvSpPr>
-          <p:cNvPr id="18" name="TextBox 17"/>
-          <p:cNvSpPr txBox="1"/>
-          <p:nvPr/>
-        </p:nvSpPr>
-        <p:spPr>
-          <a:xfrm>
-            <a:off x="12192000" y="3638550"/>
-            <a:ext cx="590550" cy="400050"/>
-          </a:xfrm>
-          <a:prstGeom prst="rect">
-            <a:avLst/>
-          </a:prstGeom>
-          <a:noFill/>
-        </p:spPr>
-        <p:txBody>
-          <a:bodyPr wrap="square" lIns="0" rIns="0" tIns="0" bIns="0" anchor="t">
-            <a:spAutoFit/>
-          </a:bodyPr>
-          <a:lstStyle/>
-          <a:p>
-            <a:pPr algn="r">
-              <a:lnSpc>
-                <a:spcPct val="100000"/>
-              </a:lnSpc>
-            </a:pPr>
-            <a:r>
-              <a:rPr sz="2550" b="1">
-                <a:solidFill>
-                  <a:srgbClr val="E4EBF4"/>
-                </a:solidFill>
-                <a:latin typeface="Pretendard"/>
-                <a:ea typeface="Pretendard"/>
-                <a:cs typeface="Pretendard"/>
-              </a:rPr>
-              <a:t>03</a:t>
-            </a:r>
-          </a:p>
-        </p:txBody>
-      </p:sp>
-      <p:sp>
-        <p:nvSpPr>
           <p:cNvPr id="19" name="TextBox 18"/>
           <p:cNvSpPr txBox="1"/>
           <p:nvPr/>
         </p:nvSpPr>
         <p:spPr>
           <a:xfrm>
-            <a:off x="9658350" y="3752850"/>
-            <a:ext cx="3067050" cy="1828800"/>
+            <a:off x="10839450" y="3448050"/>
+            <a:ext cx="6210300" cy="647700"/>
           </a:xfrm>
           <a:prstGeom prst="rect">
             <a:avLst/>
@@ -12096,34 +12826,13 @@
           </a:bodyPr>
           <a:lstStyle/>
           <a:p>
-            <a:pPr>
+            <a:pPr algn="ctr">
               <a:lnSpc>
                 <a:spcPct val="115000"/>
               </a:lnSpc>
             </a:pPr>
             <a:r>
-              <a:rPr sz="2700" b="1">
-                <a:solidFill>
-                  <a:srgbClr val="0D2B5E"/>
-                </a:solidFill>
-                <a:latin typeface="Pretendard"/>
-                <a:ea typeface="Pretendard"/>
-                <a:cs typeface="Pretendard"/>
-              </a:rPr>
-              <a:t>실습 1H</a:t>
-            </a:r>
-          </a:p>
-          <a:p>
-            <a:pPr>
-              <a:lnSpc>
-                <a:spcPct val="146000"/>
-              </a:lnSpc>
-              <a:spcBef>
-                <a:spcPts val="1050"/>
-              </a:spcBef>
-            </a:pPr>
-            <a:r>
-              <a:rPr sz="2025" b="0">
+              <a:rPr sz="1875" b="0">
                 <a:solidFill>
                   <a:srgbClr val="3D3D3D"/>
                 </a:solidFill>
@@ -12131,25 +12840,7 @@
                 <a:ea typeface="Pretendard"/>
                 <a:cs typeface="Pretendard"/>
               </a:rPr>
-              <a:t>Pandas 연동</a:t>
-            </a:r>
-          </a:p>
-          <a:p>
-            <a:pPr>
-              <a:lnSpc>
-                <a:spcPct val="146000"/>
-              </a:lnSpc>
-            </a:pPr>
-            <a:r>
-              <a:rPr sz="2025" b="0">
-                <a:solidFill>
-                  <a:srgbClr val="3D3D3D"/>
-                </a:solidFill>
-                <a:latin typeface="Pretendard"/>
-                <a:ea typeface="Pretendard"/>
-                <a:cs typeface="Pretendard"/>
-              </a:rPr>
-              <a:t>분석</a:t>
+              <a:t>3-3 오늘(1.5H 1단계)</a:t>
             </a:r>
           </a:p>
         </p:txBody>
@@ -12162,12 +12853,87 @@
         </p:nvSpPr>
         <p:spPr>
           <a:xfrm>
-            <a:off x="13430250" y="3429000"/>
-            <a:ext cx="3714750" cy="2476500"/>
+            <a:off x="1143000" y="4171950"/>
+            <a:ext cx="6682740" cy="647700"/>
           </a:xfrm>
           <a:prstGeom prst="roundRect">
             <a:avLst>
-              <a:gd name="adj" fmla="val 1923"/>
+              <a:gd name="adj" fmla="val 5882"/>
+            </a:avLst>
+          </a:prstGeom>
+          <a:solidFill>
+            <a:srgbClr val="EDF3FD"/>
+          </a:solidFill>
+          <a:ln w="9525">
+            <a:solidFill>
+              <a:srgbClr val="BFD3F5"/>
+            </a:solidFill>
+          </a:ln>
+          <a:effectLst/>
+        </p:spPr>
+        <p:txBody>
+          <a:bodyPr rtlCol="0" anchor="ctr" wrap="square"/>
+          <a:lstStyle/>
+          <a:p>
+            <a:pPr algn="ctr"/>
+          </a:p>
+        </p:txBody>
+      </p:sp>
+      <p:sp>
+        <p:nvSpPr>
+          <p:cNvPr id="21" name="TextBox 20"/>
+          <p:cNvSpPr txBox="1"/>
+          <p:nvPr/>
+        </p:nvSpPr>
+        <p:spPr>
+          <a:xfrm>
+            <a:off x="1238250" y="4171950"/>
+            <a:ext cx="6492240" cy="647700"/>
+          </a:xfrm>
+          <a:prstGeom prst="rect">
+            <a:avLst/>
+          </a:prstGeom>
+          <a:noFill/>
+        </p:spPr>
+        <p:txBody>
+          <a:bodyPr wrap="square" lIns="0" rIns="0" tIns="0" bIns="0" anchor="ctr">
+            <a:spAutoFit/>
+          </a:bodyPr>
+          <a:lstStyle/>
+          <a:p>
+            <a:pPr algn="l">
+              <a:lnSpc>
+                <a:spcPct val="115000"/>
+              </a:lnSpc>
+            </a:pPr>
+            <a:r>
+              <a:rPr sz="1875" b="1">
+                <a:solidFill>
+                  <a:srgbClr val="0D2B5E"/>
+                </a:solidFill>
+                <a:latin typeface="Pretendard"/>
+                <a:ea typeface="Pretendard"/>
+                <a:cs typeface="Pretendard"/>
+              </a:rPr>
+              <a:t>orders_step1.parquet</a:t>
+            </a:r>
+          </a:p>
+        </p:txBody>
+      </p:sp>
+      <p:sp>
+        <p:nvSpPr>
+          <p:cNvPr id="22" name="Rounded Rectangle 21"/>
+          <p:cNvSpPr/>
+          <p:nvPr/>
+        </p:nvSpPr>
+        <p:spPr>
+          <a:xfrm>
+            <a:off x="7863840" y="4171950"/>
+            <a:ext cx="2842260" cy="647700"/>
+          </a:xfrm>
+          <a:prstGeom prst="roundRect">
+            <a:avLst>
+              <a:gd name="adj" fmla="val 5882"/>
             </a:avLst>
           </a:prstGeom>
           <a:solidFill>
@@ -12190,44 +12956,580 @@
       </p:sp>
       <p:sp>
         <p:nvSpPr>
-          <p:cNvPr id="21" name="Rectangle 20"/>
-          <p:cNvSpPr/>
-          <p:nvPr/>
-        </p:nvSpPr>
-        <p:spPr>
-          <a:xfrm>
-            <a:off x="13430250" y="3429000"/>
-            <a:ext cx="3714750" cy="47625"/>
-          </a:xfrm>
-          <a:prstGeom prst="rect">
-            <a:avLst/>
-          </a:prstGeom>
-          <a:solidFill>
-            <a:srgbClr val="1E5BC6"/>
-          </a:solidFill>
-          <a:ln>
-            <a:noFill/>
-          </a:ln>
-          <a:effectLst/>
-        </p:spPr>
-        <p:txBody>
-          <a:bodyPr rtlCol="0" anchor="ctr" wrap="square"/>
-          <a:lstStyle/>
-          <a:p>
-            <a:pPr algn="ctr"/>
-          </a:p>
-        </p:txBody>
-      </p:sp>
-      <p:sp>
-        <p:nvSpPr>
-          <p:cNvPr id="22" name="TextBox 21"/>
+          <p:cNvPr id="23" name="TextBox 22"/>
           <p:cNvSpPr txBox="1"/>
           <p:nvPr/>
         </p:nvSpPr>
         <p:spPr>
           <a:xfrm>
-            <a:off x="16287750" y="3638550"/>
-            <a:ext cx="590550" cy="400050"/>
+            <a:off x="7959090" y="4171950"/>
+            <a:ext cx="2651760" cy="647700"/>
+          </a:xfrm>
+          <a:prstGeom prst="rect">
+            <a:avLst/>
+          </a:prstGeom>
+          <a:noFill/>
+        </p:spPr>
+        <p:txBody>
+          <a:bodyPr wrap="square" lIns="0" rIns="0" tIns="0" bIns="0" anchor="ctr">
+            <a:spAutoFit/>
+          </a:bodyPr>
+          <a:lstStyle/>
+          <a:p>
+            <a:pPr algn="ctr">
+              <a:lnSpc>
+                <a:spcPct val="115000"/>
+              </a:lnSpc>
+            </a:pPr>
+            <a:r>
+              <a:rPr sz="1875" b="0">
+                <a:solidFill>
+                  <a:srgbClr val="3D3D3D"/>
+                </a:solidFill>
+                <a:latin typeface="Pretendard"/>
+                <a:ea typeface="Pretendard"/>
+                <a:cs typeface="Pretendard"/>
+              </a:rPr>
+              <a:t>21K</a:t>
+            </a:r>
+          </a:p>
+        </p:txBody>
+      </p:sp>
+      <p:sp>
+        <p:nvSpPr>
+          <p:cNvPr id="24" name="Rounded Rectangle 23"/>
+          <p:cNvSpPr/>
+          <p:nvPr/>
+        </p:nvSpPr>
+        <p:spPr>
+          <a:xfrm>
+            <a:off x="10744200" y="4171950"/>
+            <a:ext cx="6400800" cy="647700"/>
+          </a:xfrm>
+          <a:prstGeom prst="roundRect">
+            <a:avLst>
+              <a:gd name="adj" fmla="val 5882"/>
+            </a:avLst>
+          </a:prstGeom>
+          <a:solidFill>
+            <a:srgbClr val="FAFBFD"/>
+          </a:solidFill>
+          <a:ln w="9525">
+            <a:solidFill>
+              <a:srgbClr val="DCE1E8"/>
+            </a:solidFill>
+          </a:ln>
+          <a:effectLst/>
+        </p:spPr>
+        <p:txBody>
+          <a:bodyPr rtlCol="0" anchor="ctr" wrap="square"/>
+          <a:lstStyle/>
+          <a:p>
+            <a:pPr algn="ctr"/>
+          </a:p>
+        </p:txBody>
+      </p:sp>
+      <p:sp>
+        <p:nvSpPr>
+          <p:cNvPr id="25" name="TextBox 24"/>
+          <p:cNvSpPr txBox="1"/>
+          <p:nvPr/>
+        </p:nvSpPr>
+        <p:spPr>
+          <a:xfrm>
+            <a:off x="10839450" y="4171950"/>
+            <a:ext cx="6210300" cy="647700"/>
+          </a:xfrm>
+          <a:prstGeom prst="rect">
+            <a:avLst/>
+          </a:prstGeom>
+          <a:noFill/>
+        </p:spPr>
+        <p:txBody>
+          <a:bodyPr wrap="square" lIns="0" rIns="0" tIns="0" bIns="0" anchor="ctr">
+            <a:spAutoFit/>
+          </a:bodyPr>
+          <a:lstStyle/>
+          <a:p>
+            <a:pPr algn="ctr">
+              <a:lnSpc>
+                <a:spcPct val="115000"/>
+              </a:lnSpc>
+            </a:pPr>
+            <a:r>
+              <a:rPr sz="1875" b="0">
+                <a:solidFill>
+                  <a:srgbClr val="3D3D3D"/>
+                </a:solidFill>
+                <a:latin typeface="Pretendard"/>
+                <a:ea typeface="Pretendard"/>
+                <a:cs typeface="Pretendard"/>
+              </a:rPr>
+              <a:t>3-1</a:t>
+            </a:r>
+          </a:p>
+        </p:txBody>
+      </p:sp>
+      <p:sp>
+        <p:nvSpPr>
+          <p:cNvPr id="26" name="Rounded Rectangle 25"/>
+          <p:cNvSpPr/>
+          <p:nvPr/>
+        </p:nvSpPr>
+        <p:spPr>
+          <a:xfrm>
+            <a:off x="1143000" y="4895850"/>
+            <a:ext cx="6682740" cy="647700"/>
+          </a:xfrm>
+          <a:prstGeom prst="roundRect">
+            <a:avLst>
+              <a:gd name="adj" fmla="val 5882"/>
+            </a:avLst>
+          </a:prstGeom>
+          <a:solidFill>
+            <a:srgbClr val="EDF3FD"/>
+          </a:solidFill>
+          <a:ln w="9525">
+            <a:solidFill>
+              <a:srgbClr val="BFD3F5"/>
+            </a:solidFill>
+          </a:ln>
+          <a:effectLst/>
+        </p:spPr>
+        <p:txBody>
+          <a:bodyPr rtlCol="0" anchor="ctr" wrap="square"/>
+          <a:lstStyle/>
+          <a:p>
+            <a:pPr algn="ctr"/>
+          </a:p>
+        </p:txBody>
+      </p:sp>
+      <p:sp>
+        <p:nvSpPr>
+          <p:cNvPr id="27" name="TextBox 26"/>
+          <p:cNvSpPr txBox="1"/>
+          <p:nvPr/>
+        </p:nvSpPr>
+        <p:spPr>
+          <a:xfrm>
+            <a:off x="1238250" y="4895850"/>
+            <a:ext cx="6492240" cy="647700"/>
+          </a:xfrm>
+          <a:prstGeom prst="rect">
+            <a:avLst/>
+          </a:prstGeom>
+          <a:noFill/>
+        </p:spPr>
+        <p:txBody>
+          <a:bodyPr wrap="square" lIns="0" rIns="0" tIns="0" bIns="0" anchor="ctr">
+            <a:spAutoFit/>
+          </a:bodyPr>
+          <a:lstStyle/>
+          <a:p>
+            <a:pPr algn="l">
+              <a:lnSpc>
+                <a:spcPct val="115000"/>
+              </a:lnSpc>
+            </a:pPr>
+            <a:r>
+              <a:rPr sz="1875" b="1">
+                <a:solidFill>
+                  <a:srgbClr val="0D2B5E"/>
+                </a:solidFill>
+                <a:latin typeface="Pretendard"/>
+                <a:ea typeface="Pretendard"/>
+                <a:cs typeface="Pretendard"/>
+              </a:rPr>
+              <a:t>customers.csv</a:t>
+            </a:r>
+          </a:p>
+        </p:txBody>
+      </p:sp>
+      <p:sp>
+        <p:nvSpPr>
+          <p:cNvPr id="28" name="Rounded Rectangle 27"/>
+          <p:cNvSpPr/>
+          <p:nvPr/>
+        </p:nvSpPr>
+        <p:spPr>
+          <a:xfrm>
+            <a:off x="7863840" y="4895850"/>
+            <a:ext cx="2842260" cy="647700"/>
+          </a:xfrm>
+          <a:prstGeom prst="roundRect">
+            <a:avLst>
+              <a:gd name="adj" fmla="val 5882"/>
+            </a:avLst>
+          </a:prstGeom>
+          <a:solidFill>
+            <a:srgbClr val="FAFBFD"/>
+          </a:solidFill>
+          <a:ln w="9525">
+            <a:solidFill>
+              <a:srgbClr val="DCE1E8"/>
+            </a:solidFill>
+          </a:ln>
+          <a:effectLst/>
+        </p:spPr>
+        <p:txBody>
+          <a:bodyPr rtlCol="0" anchor="ctr" wrap="square"/>
+          <a:lstStyle/>
+          <a:p>
+            <a:pPr algn="ctr"/>
+          </a:p>
+        </p:txBody>
+      </p:sp>
+      <p:sp>
+        <p:nvSpPr>
+          <p:cNvPr id="29" name="TextBox 28"/>
+          <p:cNvSpPr txBox="1"/>
+          <p:nvPr/>
+        </p:nvSpPr>
+        <p:spPr>
+          <a:xfrm>
+            <a:off x="7959090" y="4895850"/>
+            <a:ext cx="2651760" cy="647700"/>
+          </a:xfrm>
+          <a:prstGeom prst="rect">
+            <a:avLst/>
+          </a:prstGeom>
+          <a:noFill/>
+        </p:spPr>
+        <p:txBody>
+          <a:bodyPr wrap="square" lIns="0" rIns="0" tIns="0" bIns="0" anchor="ctr">
+            <a:spAutoFit/>
+          </a:bodyPr>
+          <a:lstStyle/>
+          <a:p>
+            <a:pPr algn="ctr">
+              <a:lnSpc>
+                <a:spcPct val="115000"/>
+              </a:lnSpc>
+            </a:pPr>
+            <a:r>
+              <a:rPr sz="1875" b="0">
+                <a:solidFill>
+                  <a:srgbClr val="3D3D3D"/>
+                </a:solidFill>
+                <a:latin typeface="Pretendard"/>
+                <a:ea typeface="Pretendard"/>
+                <a:cs typeface="Pretendard"/>
+              </a:rPr>
+              <a:t>4.2K</a:t>
+            </a:r>
+          </a:p>
+        </p:txBody>
+      </p:sp>
+      <p:sp>
+        <p:nvSpPr>
+          <p:cNvPr id="30" name="Rounded Rectangle 29"/>
+          <p:cNvSpPr/>
+          <p:nvPr/>
+        </p:nvSpPr>
+        <p:spPr>
+          <a:xfrm>
+            <a:off x="10744200" y="4895850"/>
+            <a:ext cx="6400800" cy="647700"/>
+          </a:xfrm>
+          <a:prstGeom prst="roundRect">
+            <a:avLst>
+              <a:gd name="adj" fmla="val 5882"/>
+            </a:avLst>
+          </a:prstGeom>
+          <a:solidFill>
+            <a:srgbClr val="FAFBFD"/>
+          </a:solidFill>
+          <a:ln w="9525">
+            <a:solidFill>
+              <a:srgbClr val="DCE1E8"/>
+            </a:solidFill>
+          </a:ln>
+          <a:effectLst/>
+        </p:spPr>
+        <p:txBody>
+          <a:bodyPr rtlCol="0" anchor="ctr" wrap="square"/>
+          <a:lstStyle/>
+          <a:p>
+            <a:pPr algn="ctr"/>
+          </a:p>
+        </p:txBody>
+      </p:sp>
+      <p:sp>
+        <p:nvSpPr>
+          <p:cNvPr id="31" name="TextBox 30"/>
+          <p:cNvSpPr txBox="1"/>
+          <p:nvPr/>
+        </p:nvSpPr>
+        <p:spPr>
+          <a:xfrm>
+            <a:off x="10839450" y="4895850"/>
+            <a:ext cx="6210300" cy="647700"/>
+          </a:xfrm>
+          <a:prstGeom prst="rect">
+            <a:avLst/>
+          </a:prstGeom>
+          <a:noFill/>
+        </p:spPr>
+        <p:txBody>
+          <a:bodyPr wrap="square" lIns="0" rIns="0" tIns="0" bIns="0" anchor="ctr">
+            <a:spAutoFit/>
+          </a:bodyPr>
+          <a:lstStyle/>
+          <a:p>
+            <a:pPr algn="ctr">
+              <a:lnSpc>
+                <a:spcPct val="115000"/>
+              </a:lnSpc>
+            </a:pPr>
+            <a:r>
+              <a:rPr sz="1875" b="0">
+                <a:solidFill>
+                  <a:srgbClr val="3D3D3D"/>
+                </a:solidFill>
+                <a:latin typeface="Pretendard"/>
+                <a:ea typeface="Pretendard"/>
+                <a:cs typeface="Pretendard"/>
+              </a:rPr>
+              <a:t>3-2</a:t>
+            </a:r>
+          </a:p>
+        </p:txBody>
+      </p:sp>
+      <p:sp>
+        <p:nvSpPr>
+          <p:cNvPr id="32" name="Rounded Rectangle 31"/>
+          <p:cNvSpPr/>
+          <p:nvPr/>
+        </p:nvSpPr>
+        <p:spPr>
+          <a:xfrm>
+            <a:off x="1143000" y="5619750"/>
+            <a:ext cx="6682740" cy="647700"/>
+          </a:xfrm>
+          <a:prstGeom prst="roundRect">
+            <a:avLst>
+              <a:gd name="adj" fmla="val 5882"/>
+            </a:avLst>
+          </a:prstGeom>
+          <a:solidFill>
+            <a:srgbClr val="EDF3FD"/>
+          </a:solidFill>
+          <a:ln w="9525">
+            <a:solidFill>
+              <a:srgbClr val="BFD3F5"/>
+            </a:solidFill>
+          </a:ln>
+          <a:effectLst/>
+        </p:spPr>
+        <p:txBody>
+          <a:bodyPr rtlCol="0" anchor="ctr" wrap="square"/>
+          <a:lstStyle/>
+          <a:p>
+            <a:pPr algn="ctr"/>
+          </a:p>
+        </p:txBody>
+      </p:sp>
+      <p:sp>
+        <p:nvSpPr>
+          <p:cNvPr id="33" name="TextBox 32"/>
+          <p:cNvSpPr txBox="1"/>
+          <p:nvPr/>
+        </p:nvSpPr>
+        <p:spPr>
+          <a:xfrm>
+            <a:off x="1238250" y="5619750"/>
+            <a:ext cx="6492240" cy="647700"/>
+          </a:xfrm>
+          <a:prstGeom prst="rect">
+            <a:avLst/>
+          </a:prstGeom>
+          <a:noFill/>
+        </p:spPr>
+        <p:txBody>
+          <a:bodyPr wrap="square" lIns="0" rIns="0" tIns="0" bIns="0" anchor="ctr">
+            <a:spAutoFit/>
+          </a:bodyPr>
+          <a:lstStyle/>
+          <a:p>
+            <a:pPr algn="l">
+              <a:lnSpc>
+                <a:spcPct val="115000"/>
+              </a:lnSpc>
+            </a:pPr>
+            <a:r>
+              <a:rPr sz="1875" b="1">
+                <a:solidFill>
+                  <a:srgbClr val="0D2B5E"/>
+                </a:solidFill>
+                <a:latin typeface="Pretendard"/>
+                <a:ea typeface="Pretendard"/>
+                <a:cs typeface="Pretendard"/>
+              </a:rPr>
+              <a:t>orders_enriched.parquet</a:t>
+            </a:r>
+          </a:p>
+        </p:txBody>
+      </p:sp>
+      <p:sp>
+        <p:nvSpPr>
+          <p:cNvPr id="34" name="Rounded Rectangle 33"/>
+          <p:cNvSpPr/>
+          <p:nvPr/>
+        </p:nvSpPr>
+        <p:spPr>
+          <a:xfrm>
+            <a:off x="7863840" y="5619750"/>
+            <a:ext cx="2842260" cy="647700"/>
+          </a:xfrm>
+          <a:prstGeom prst="roundRect">
+            <a:avLst>
+              <a:gd name="adj" fmla="val 5882"/>
+            </a:avLst>
+          </a:prstGeom>
+          <a:solidFill>
+            <a:srgbClr val="FAFBFD"/>
+          </a:solidFill>
+          <a:ln w="9525">
+            <a:solidFill>
+              <a:srgbClr val="DCE1E8"/>
+            </a:solidFill>
+          </a:ln>
+          <a:effectLst/>
+        </p:spPr>
+        <p:txBody>
+          <a:bodyPr rtlCol="0" anchor="ctr" wrap="square"/>
+          <a:lstStyle/>
+          <a:p>
+            <a:pPr algn="ctr"/>
+          </a:p>
+        </p:txBody>
+      </p:sp>
+      <p:sp>
+        <p:nvSpPr>
+          <p:cNvPr id="35" name="TextBox 34"/>
+          <p:cNvSpPr txBox="1"/>
+          <p:nvPr/>
+        </p:nvSpPr>
+        <p:spPr>
+          <a:xfrm>
+            <a:off x="7959090" y="5619750"/>
+            <a:ext cx="2651760" cy="647700"/>
+          </a:xfrm>
+          <a:prstGeom prst="rect">
+            <a:avLst/>
+          </a:prstGeom>
+          <a:noFill/>
+        </p:spPr>
+        <p:txBody>
+          <a:bodyPr wrap="square" lIns="0" rIns="0" tIns="0" bIns="0" anchor="ctr">
+            <a:spAutoFit/>
+          </a:bodyPr>
+          <a:lstStyle/>
+          <a:p>
+            <a:pPr algn="ctr">
+              <a:lnSpc>
+                <a:spcPct val="115000"/>
+              </a:lnSpc>
+            </a:pPr>
+            <a:r>
+              <a:rPr sz="1875" b="0">
+                <a:solidFill>
+                  <a:srgbClr val="3D3D3D"/>
+                </a:solidFill>
+                <a:latin typeface="Pretendard"/>
+                <a:ea typeface="Pretendard"/>
+                <a:cs typeface="Pretendard"/>
+              </a:rPr>
+              <a:t>24K</a:t>
+            </a:r>
+          </a:p>
+        </p:txBody>
+      </p:sp>
+      <p:sp>
+        <p:nvSpPr>
+          <p:cNvPr id="36" name="Rounded Rectangle 35"/>
+          <p:cNvSpPr/>
+          <p:nvPr/>
+        </p:nvSpPr>
+        <p:spPr>
+          <a:xfrm>
+            <a:off x="10744200" y="5619750"/>
+            <a:ext cx="6400800" cy="647700"/>
+          </a:xfrm>
+          <a:prstGeom prst="roundRect">
+            <a:avLst>
+              <a:gd name="adj" fmla="val 5882"/>
+            </a:avLst>
+          </a:prstGeom>
+          <a:solidFill>
+            <a:srgbClr val="FAFBFD"/>
+          </a:solidFill>
+          <a:ln w="9525">
+            <a:solidFill>
+              <a:srgbClr val="DCE1E8"/>
+            </a:solidFill>
+          </a:ln>
+          <a:effectLst/>
+        </p:spPr>
+        <p:txBody>
+          <a:bodyPr rtlCol="0" anchor="ctr" wrap="square"/>
+          <a:lstStyle/>
+          <a:p>
+            <a:pPr algn="ctr"/>
+          </a:p>
+        </p:txBody>
+      </p:sp>
+      <p:sp>
+        <p:nvSpPr>
+          <p:cNvPr id="37" name="TextBox 36"/>
+          <p:cNvSpPr txBox="1"/>
+          <p:nvPr/>
+        </p:nvSpPr>
+        <p:spPr>
+          <a:xfrm>
+            <a:off x="10839450" y="5619750"/>
+            <a:ext cx="6210300" cy="647700"/>
+          </a:xfrm>
+          <a:prstGeom prst="rect">
+            <a:avLst/>
+          </a:prstGeom>
+          <a:noFill/>
+        </p:spPr>
+        <p:txBody>
+          <a:bodyPr wrap="square" lIns="0" rIns="0" tIns="0" bIns="0" anchor="ctr">
+            <a:spAutoFit/>
+          </a:bodyPr>
+          <a:lstStyle/>
+          <a:p>
+            <a:pPr algn="ctr">
+              <a:lnSpc>
+                <a:spcPct val="115000"/>
+              </a:lnSpc>
+            </a:pPr>
+            <a:r>
+              <a:rPr sz="1875" b="0">
+                <a:solidFill>
+                  <a:srgbClr val="3D3D3D"/>
+                </a:solidFill>
+                <a:latin typeface="Pretendard"/>
+                <a:ea typeface="Pretendard"/>
+                <a:cs typeface="Pretendard"/>
+              </a:rPr>
+              <a:t>3-2</a:t>
+            </a:r>
+          </a:p>
+        </p:txBody>
+      </p:sp>
+      <p:sp>
+        <p:nvSpPr>
+          <p:cNvPr id="38" name="TextBox 37"/>
+          <p:cNvSpPr txBox="1"/>
+          <p:nvPr/>
+        </p:nvSpPr>
+        <p:spPr>
+          <a:xfrm>
+            <a:off x="1143000" y="6362700"/>
+            <a:ext cx="16002000" cy="438150"/>
           </a:xfrm>
           <a:prstGeom prst="rect">
             <a:avLst/>
@@ -12240,145 +13542,35 @@
           </a:bodyPr>
           <a:lstStyle/>
           <a:p>
-            <a:pPr algn="r">
+            <a:pPr algn="ctr">
               <a:lnSpc>
                 <a:spcPct val="100000"/>
               </a:lnSpc>
             </a:pPr>
             <a:r>
-              <a:rPr sz="2550" b="1">
-                <a:solidFill>
-                  <a:srgbClr val="E4EBF4"/>
-                </a:solidFill>
-                <a:latin typeface="Pretendard"/>
-                <a:ea typeface="Pretendard"/>
-                <a:cs typeface="Pretendard"/>
-              </a:rPr>
-              <a:t>04</a:t>
-            </a:r>
-          </a:p>
-        </p:txBody>
-      </p:sp>
-      <p:sp>
-        <p:nvSpPr>
-          <p:cNvPr id="23" name="TextBox 22"/>
+              <a:rPr sz="1875" b="1">
+                <a:solidFill>
+                  <a:srgbClr val="7D7D7D"/>
+                </a:solidFill>
+                <a:latin typeface="Pretendard"/>
+                <a:ea typeface="Pretendard"/>
+                <a:cs typeface="Pretendard"/>
+              </a:rPr>
+              <a:t>events.csv 는 3-5 심화 과제가 쓰니 그대로 둔다</a:t>
+            </a:r>
+          </a:p>
+        </p:txBody>
+      </p:sp>
+      <p:sp>
+        <p:nvSpPr>
+          <p:cNvPr id="39" name="TextBox 38"/>
           <p:cNvSpPr txBox="1"/>
           <p:nvPr/>
         </p:nvSpPr>
         <p:spPr>
           <a:xfrm>
-            <a:off x="13754100" y="3752850"/>
-            <a:ext cx="3067050" cy="1828800"/>
-          </a:xfrm>
-          <a:prstGeom prst="rect">
-            <a:avLst/>
-          </a:prstGeom>
-          <a:noFill/>
-        </p:spPr>
-        <p:txBody>
-          <a:bodyPr wrap="square" lIns="0" rIns="0" tIns="0" bIns="0" anchor="ctr">
-            <a:spAutoFit/>
-          </a:bodyPr>
-          <a:lstStyle/>
-          <a:p>
-            <a:pPr>
-              <a:lnSpc>
-                <a:spcPct val="115000"/>
-              </a:lnSpc>
-            </a:pPr>
-            <a:r>
-              <a:rPr sz="2700" b="1">
-                <a:solidFill>
-                  <a:srgbClr val="0D2B5E"/>
-                </a:solidFill>
-                <a:latin typeface="Pretendard"/>
-                <a:ea typeface="Pretendard"/>
-                <a:cs typeface="Pretendard"/>
-              </a:rPr>
-              <a:t>정리 0.5H</a:t>
-            </a:r>
-          </a:p>
-          <a:p>
-            <a:pPr>
-              <a:lnSpc>
-                <a:spcPct val="146000"/>
-              </a:lnSpc>
-              <a:spcBef>
-                <a:spcPts val="1050"/>
-              </a:spcBef>
-            </a:pPr>
-            <a:r>
-              <a:rPr sz="2025" b="0">
-                <a:solidFill>
-                  <a:srgbClr val="3D3D3D"/>
-                </a:solidFill>
-                <a:latin typeface="Pretendard"/>
-                <a:ea typeface="Pretendard"/>
-                <a:cs typeface="Pretendard"/>
-              </a:rPr>
-              <a:t>핵심 요약</a:t>
-            </a:r>
-          </a:p>
-          <a:p>
-            <a:pPr>
-              <a:lnSpc>
-                <a:spcPct val="146000"/>
-              </a:lnSpc>
-            </a:pPr>
-            <a:r>
-              <a:rPr sz="2025" b="0">
-                <a:solidFill>
-                  <a:srgbClr val="3D3D3D"/>
-                </a:solidFill>
-                <a:latin typeface="Pretendard"/>
-                <a:ea typeface="Pretendard"/>
-                <a:cs typeface="Pretendard"/>
-              </a:rPr>
-              <a:t>체크리스트 점검</a:t>
-            </a:r>
-          </a:p>
-        </p:txBody>
-      </p:sp>
-      <p:sp>
-        <p:nvSpPr>
-          <p:cNvPr id="24" name="Rectangle 23"/>
-          <p:cNvSpPr/>
-          <p:nvPr/>
-        </p:nvSpPr>
-        <p:spPr>
-          <a:xfrm>
-            <a:off x="1143000" y="6496050"/>
-            <a:ext cx="47625" cy="723900"/>
-          </a:xfrm>
-          <a:prstGeom prst="rect">
-            <a:avLst/>
-          </a:prstGeom>
-          <a:solidFill>
-            <a:srgbClr val="1E5BC6"/>
-          </a:solidFill>
-          <a:ln>
-            <a:noFill/>
-          </a:ln>
-          <a:effectLst/>
-        </p:spPr>
-        <p:txBody>
-          <a:bodyPr rtlCol="0" anchor="ctr" wrap="square"/>
-          <a:lstStyle/>
-          <a:p>
-            <a:pPr algn="ctr"/>
-          </a:p>
-        </p:txBody>
-      </p:sp>
-      <p:sp>
-        <p:nvSpPr>
-          <p:cNvPr id="25" name="TextBox 24"/>
-          <p:cNvSpPr txBox="1"/>
-          <p:nvPr/>
-        </p:nvSpPr>
-        <p:spPr>
-          <a:xfrm>
-            <a:off x="1390650" y="6553200"/>
-            <a:ext cx="15754350" cy="762000"/>
+            <a:off x="1143000" y="7620000"/>
+            <a:ext cx="16002000" cy="342900"/>
           </a:xfrm>
           <a:prstGeom prst="rect">
             <a:avLst/>
@@ -12393,11 +13585,11 @@
           <a:p>
             <a:pPr algn="l">
               <a:lnSpc>
-                <a:spcPct val="150000"/>
-              </a:lnSpc>
-            </a:pPr>
-            <a:r>
-              <a:rPr sz="2025" b="1">
+                <a:spcPct val="100000"/>
+              </a:lnSpc>
+            </a:pPr>
+            <a:r>
+              <a:rPr sz="1875" b="1">
                 <a:solidFill>
                   <a:srgbClr val="7D7D7D"/>
                 </a:solidFill>
@@ -12405,14 +13597,14 @@
                 <a:ea typeface="Pretendard"/>
                 <a:cs typeface="Pretendard"/>
               </a:rPr>
-              <a:t>준비: venv + duckdb·pandas·pyarrow · 3-3 events.parquet · 3-1 orders_step1.parquet · 3-2 customers.csv 를 작업 폴더에</a:t>
-            </a:r>
-          </a:p>
-        </p:txBody>
-      </p:sp>
-      <p:sp>
-        <p:nvSpPr>
-          <p:cNvPr id="26" name="Rectangle 25"/>
+              <a:t>ls -lh events.parquet orders_step1.parquet customers.csv orders_enriched.parquet — 네 줄이면 준비 끝</a:t>
+            </a:r>
+          </a:p>
+        </p:txBody>
+      </p:sp>
+      <p:sp>
+        <p:nvSpPr>
+          <p:cNvPr id="40" name="Rectangle 39"/>
           <p:cNvSpPr/>
           <p:nvPr/>
         </p:nvSpPr>
@@ -12442,7 +13634,7 @@
       </p:sp>
       <p:sp>
         <p:nvSpPr>
-          <p:cNvPr id="27" name="TextBox 26"/>
+          <p:cNvPr id="41" name="TextBox 40"/>
           <p:cNvSpPr txBox="1"/>
           <p:nvPr/>
         </p:nvSpPr>
@@ -12483,7 +13675,7 @@
       </p:sp>
       <p:sp>
         <p:nvSpPr>
-          <p:cNvPr id="28" name="TextBox 27"/>
+          <p:cNvPr id="42" name="TextBox 41"/>
           <p:cNvSpPr txBox="1"/>
           <p:nvPr/>
         </p:nvSpPr>
@@ -12542,14 +13734,14 @@
       <p:grpSpPr/>
       <p:sp>
         <p:nvSpPr>
-          <p:cNvPr id="2" name="Oval 1"/>
-          <p:cNvSpPr/>
-          <p:nvPr/>
-        </p:nvSpPr>
-        <p:spPr>
-          <a:xfrm>
-            <a:off x="14859000" y="6667500"/>
-            <a:ext cx="5905500" cy="5905500"/>
+          <p:cNvPr id="2" name="deckgen:decor"/>
+          <p:cNvSpPr/>
+          <p:nvPr/>
+        </p:nvSpPr>
+        <p:spPr>
+          <a:xfrm>
+            <a:off x="15811500" y="8382000"/>
+            <a:ext cx="4953000" cy="4953000"/>
           </a:xfrm>
           <a:prstGeom prst="ellipse">
             <a:avLst/>
@@ -12572,20 +13764,20 @@
       </p:sp>
       <p:sp>
         <p:nvSpPr>
-          <p:cNvPr id="3" name="Oval 2"/>
-          <p:cNvSpPr/>
-          <p:nvPr/>
-        </p:nvSpPr>
-        <p:spPr>
-          <a:xfrm>
-            <a:off x="-2095500" y="-2095500"/>
-            <a:ext cx="4381500" cy="4381500"/>
+          <p:cNvPr id="3" name="deckgen:decor"/>
+          <p:cNvSpPr/>
+          <p:nvPr/>
+        </p:nvSpPr>
+        <p:spPr>
+          <a:xfrm>
+            <a:off x="16859250" y="9429750"/>
+            <a:ext cx="2857500" cy="2857500"/>
           </a:xfrm>
           <a:prstGeom prst="ellipse">
             <a:avLst/>
           </a:prstGeom>
           <a:solidFill>
-            <a:srgbClr val="F5F6F8"/>
+            <a:srgbClr val="FFFFFF"/>
           </a:solidFill>
           <a:ln>
             <a:noFill/>
@@ -12602,20 +13794,20 @@
       </p:sp>
       <p:sp>
         <p:nvSpPr>
-          <p:cNvPr id="4" name="Rectangle 3"/>
-          <p:cNvSpPr/>
-          <p:nvPr/>
-        </p:nvSpPr>
-        <p:spPr>
-          <a:xfrm>
-            <a:off x="1143000" y="2857500"/>
-            <a:ext cx="16002000" cy="28575"/>
-          </a:xfrm>
-          <a:prstGeom prst="rect">
-            <a:avLst/>
-          </a:prstGeom>
-          <a:solidFill>
-            <a:srgbClr val="0D2B5E"/>
+          <p:cNvPr id="4" name="deckgen:decor"/>
+          <p:cNvSpPr/>
+          <p:nvPr/>
+        </p:nvSpPr>
+        <p:spPr>
+          <a:xfrm>
+            <a:off x="-1428750" y="1428750"/>
+            <a:ext cx="2857500" cy="2857500"/>
+          </a:xfrm>
+          <a:prstGeom prst="ellipse">
+            <a:avLst/>
+          </a:prstGeom>
+          <a:solidFill>
+            <a:srgbClr val="F7F8FA"/>
           </a:solidFill>
           <a:ln>
             <a:noFill/>
@@ -12638,8 +13830,8 @@
         </p:nvSpPr>
         <p:spPr>
           <a:xfrm>
-            <a:off x="1143000" y="3352800"/>
-            <a:ext cx="8572500" cy="419100"/>
+            <a:off x="1143000" y="838200"/>
+            <a:ext cx="16002000" cy="342900"/>
           </a:xfrm>
           <a:prstGeom prst="rect">
             <a:avLst/>
@@ -12658,7 +13850,7 @@
               </a:lnSpc>
             </a:pPr>
             <a:r>
-              <a:rPr sz="2400" b="1">
+              <a:rPr sz="1950" b="1" spc="160">
                 <a:solidFill>
                   <a:srgbClr val="1E5BC6"/>
                 </a:solidFill>
@@ -12666,7 +13858,7 @@
                 <a:ea typeface="Pretendard"/>
                 <a:cs typeface="Pretendard"/>
               </a:rPr>
-              <a:t>3-3 · 정리·회고 0.5H 마무리</a:t>
+              <a:t>다음 회차 예고</a:t>
             </a:r>
           </a:p>
         </p:txBody>
@@ -12679,8 +13871,8 @@
         </p:nvSpPr>
         <p:spPr>
           <a:xfrm>
-            <a:off x="1143000" y="3771900"/>
-            <a:ext cx="16002000" cy="800100"/>
+            <a:off x="1143000" y="1162050"/>
+            <a:ext cx="16002000" cy="762000"/>
           </a:xfrm>
           <a:prstGeom prst="rect">
             <a:avLst/>
@@ -12707,49 +13899,38 @@
                 <a:ea typeface="Pretendard"/>
                 <a:cs typeface="Pretendard"/>
               </a:rPr>
-              <a:t>다음 회차는 3-4 DuckDB 데이터 분석</a:t>
-            </a:r>
-          </a:p>
-        </p:txBody>
-      </p:sp>
-      <p:sp>
-        <p:nvSpPr>
-          <p:cNvPr id="7" name="TextBox 6"/>
-          <p:cNvSpPr txBox="1"/>
-          <p:nvPr/>
-        </p:nvSpPr>
-        <p:spPr>
-          <a:xfrm>
-            <a:off x="1143000" y="4724400"/>
-            <a:ext cx="16002000" cy="438150"/>
-          </a:xfrm>
-          <a:prstGeom prst="rect">
-            <a:avLst/>
-          </a:prstGeom>
-          <a:noFill/>
-        </p:spPr>
-        <p:txBody>
-          <a:bodyPr wrap="square" lIns="0" rIns="0" tIns="0" bIns="0" anchor="t">
-            <a:spAutoFit/>
-          </a:bodyPr>
-          <a:lstStyle/>
-          <a:p>
-            <a:pPr algn="l">
-              <a:lnSpc>
-                <a:spcPct val="130000"/>
-              </a:lnSpc>
-            </a:pPr>
-            <a:r>
-              <a:rPr sz="2400" b="0">
-                <a:solidFill>
-                  <a:srgbClr val="3D3D3D"/>
-                </a:solidFill>
-                <a:latin typeface="Pretendard"/>
-                <a:ea typeface="Pretendard"/>
-                <a:cs typeface="Pretendard"/>
-              </a:rPr>
-              <a:t>SQL 로 질문하기 — 집계·조인·윈도 함수·CTE 를 익히고, DuckDB 와 Pandas 를 왕복하는 감각을 손에 익힙니다</a:t>
-            </a:r>
+              <a:t>3-4 · DuckDB를 이용한 데이터 분석</a:t>
+            </a:r>
+          </a:p>
+        </p:txBody>
+      </p:sp>
+      <p:sp>
+        <p:nvSpPr>
+          <p:cNvPr id="7" name="Rectangle 6"/>
+          <p:cNvSpPr/>
+          <p:nvPr/>
+        </p:nvSpPr>
+        <p:spPr>
+          <a:xfrm>
+            <a:off x="1143000" y="2038350"/>
+            <a:ext cx="16002000" cy="28575"/>
+          </a:xfrm>
+          <a:prstGeom prst="rect">
+            <a:avLst/>
+          </a:prstGeom>
+          <a:solidFill>
+            <a:srgbClr val="0D2B5E"/>
+          </a:solidFill>
+          <a:ln>
+            <a:noFill/>
+          </a:ln>
+          <a:effectLst/>
+        </p:spPr>
+        <p:txBody>
+          <a:bodyPr rtlCol="0" anchor="ctr" wrap="square"/>
+          <a:lstStyle/>
+          <a:p>
+            <a:pPr algn="ctr"/>
           </a:p>
         </p:txBody>
       </p:sp>
@@ -12761,12 +13942,12 @@
         </p:nvSpPr>
         <p:spPr>
           <a:xfrm>
-            <a:off x="1143000" y="5257800"/>
-            <a:ext cx="7772400" cy="819150"/>
+            <a:off x="1143000" y="3429000"/>
+            <a:ext cx="3714750" cy="2476500"/>
           </a:xfrm>
           <a:prstGeom prst="roundRect">
             <a:avLst>
-              <a:gd name="adj" fmla="val 6976"/>
+              <a:gd name="adj" fmla="val 1923"/>
             </a:avLst>
           </a:prstGeom>
           <a:solidFill>
@@ -12789,14 +13970,44 @@
       </p:sp>
       <p:sp>
         <p:nvSpPr>
-          <p:cNvPr id="9" name="TextBox 8"/>
+          <p:cNvPr id="9" name="Rectangle 8"/>
+          <p:cNvSpPr/>
+          <p:nvPr/>
+        </p:nvSpPr>
+        <p:spPr>
+          <a:xfrm>
+            <a:off x="1143000" y="3429000"/>
+            <a:ext cx="3714750" cy="47625"/>
+          </a:xfrm>
+          <a:prstGeom prst="rect">
+            <a:avLst/>
+          </a:prstGeom>
+          <a:solidFill>
+            <a:srgbClr val="1E5BC6"/>
+          </a:solidFill>
+          <a:ln>
+            <a:noFill/>
+          </a:ln>
+          <a:effectLst/>
+        </p:spPr>
+        <p:txBody>
+          <a:bodyPr rtlCol="0" anchor="ctr" wrap="square"/>
+          <a:lstStyle/>
+          <a:p>
+            <a:pPr algn="ctr"/>
+          </a:p>
+        </p:txBody>
+      </p:sp>
+      <p:sp>
+        <p:nvSpPr>
+          <p:cNvPr id="10" name="deckgen:ornament"/>
           <p:cNvSpPr txBox="1"/>
           <p:nvPr/>
         </p:nvSpPr>
         <p:spPr>
           <a:xfrm>
-            <a:off x="1428750" y="5486400"/>
-            <a:ext cx="419100" cy="381000"/>
+            <a:off x="4000500" y="3638550"/>
+            <a:ext cx="590550" cy="400050"/>
           </a:xfrm>
           <a:prstGeom prst="rect">
             <a:avLst/>
@@ -12809,35 +14020,179 @@
           </a:bodyPr>
           <a:lstStyle/>
           <a:p>
-            <a:pPr algn="l">
+            <a:pPr algn="r">
               <a:lnSpc>
                 <a:spcPct val="100000"/>
               </a:lnSpc>
             </a:pPr>
             <a:r>
-              <a:rPr sz="2475" b="1">
-                <a:solidFill>
-                  <a:srgbClr val="1E5BC6"/>
-                </a:solidFill>
-                <a:latin typeface="Pretendard"/>
-                <a:ea typeface="Pretendard"/>
-                <a:cs typeface="Pretendard"/>
-              </a:rPr>
-              <a:t>✓</a:t>
-            </a:r>
-          </a:p>
-        </p:txBody>
-      </p:sp>
-      <p:sp>
-        <p:nvSpPr>
-          <p:cNvPr id="10" name="TextBox 9"/>
+              <a:rPr sz="2550" b="1">
+                <a:solidFill>
+                  <a:srgbClr val="E4EBF4"/>
+                </a:solidFill>
+                <a:latin typeface="Pretendard"/>
+                <a:ea typeface="Pretendard"/>
+                <a:cs typeface="Pretendard"/>
+              </a:rPr>
+              <a:t>01</a:t>
+            </a:r>
+          </a:p>
+        </p:txBody>
+      </p:sp>
+      <p:sp>
+        <p:nvSpPr>
+          <p:cNvPr id="11" name="TextBox 10"/>
           <p:cNvSpPr txBox="1"/>
           <p:nvPr/>
         </p:nvSpPr>
         <p:spPr>
           <a:xfrm>
-            <a:off x="1905000" y="5486400"/>
-            <a:ext cx="6724650" cy="381000"/>
+            <a:off x="1466850" y="3752850"/>
+            <a:ext cx="3067050" cy="1828800"/>
+          </a:xfrm>
+          <a:prstGeom prst="rect">
+            <a:avLst/>
+          </a:prstGeom>
+          <a:noFill/>
+        </p:spPr>
+        <p:txBody>
+          <a:bodyPr wrap="square" lIns="0" rIns="0" tIns="0" bIns="0" anchor="ctr">
+            <a:spAutoFit/>
+          </a:bodyPr>
+          <a:lstStyle/>
+          <a:p>
+            <a:pPr>
+              <a:lnSpc>
+                <a:spcPct val="115000"/>
+              </a:lnSpc>
+            </a:pPr>
+            <a:r>
+              <a:rPr sz="2700" b="1">
+                <a:solidFill>
+                  <a:srgbClr val="0D2B5E"/>
+                </a:solidFill>
+                <a:latin typeface="Pretendard"/>
+                <a:ea typeface="Pretendard"/>
+                <a:cs typeface="Pretendard"/>
+              </a:rPr>
+              <a:t>이론 1H</a:t>
+            </a:r>
+          </a:p>
+          <a:p>
+            <a:pPr>
+              <a:lnSpc>
+                <a:spcPct val="146000"/>
+              </a:lnSpc>
+              <a:spcBef>
+                <a:spcPts val="1050"/>
+              </a:spcBef>
+            </a:pPr>
+            <a:r>
+              <a:rPr sz="2025" b="0">
+                <a:solidFill>
+                  <a:srgbClr val="3D3D3D"/>
+                </a:solidFill>
+                <a:latin typeface="Pretendard"/>
+                <a:ea typeface="Pretendard"/>
+                <a:cs typeface="Pretendard"/>
+              </a:rPr>
+              <a:t>SQL 분석 문법</a:t>
+            </a:r>
+          </a:p>
+          <a:p>
+            <a:pPr>
+              <a:lnSpc>
+                <a:spcPct val="146000"/>
+              </a:lnSpc>
+            </a:pPr>
+            <a:r>
+              <a:rPr sz="2025" b="0">
+                <a:solidFill>
+                  <a:srgbClr val="3D3D3D"/>
+                </a:solidFill>
+                <a:latin typeface="Pretendard"/>
+                <a:ea typeface="Pretendard"/>
+                <a:cs typeface="Pretendard"/>
+              </a:rPr>
+              <a:t>집계·윈도·CTE</a:t>
+            </a:r>
+          </a:p>
+        </p:txBody>
+      </p:sp>
+      <p:sp>
+        <p:nvSpPr>
+          <p:cNvPr id="12" name="Rounded Rectangle 11"/>
+          <p:cNvSpPr/>
+          <p:nvPr/>
+        </p:nvSpPr>
+        <p:spPr>
+          <a:xfrm>
+            <a:off x="5238750" y="3429000"/>
+            <a:ext cx="3714750" cy="2476500"/>
+          </a:xfrm>
+          <a:prstGeom prst="roundRect">
+            <a:avLst>
+              <a:gd name="adj" fmla="val 1923"/>
+            </a:avLst>
+          </a:prstGeom>
+          <a:solidFill>
+            <a:srgbClr val="0D2B5E"/>
+          </a:solidFill>
+          <a:ln w="9525">
+            <a:solidFill>
+              <a:srgbClr val="0D2B5E"/>
+            </a:solidFill>
+          </a:ln>
+          <a:effectLst/>
+        </p:spPr>
+        <p:txBody>
+          <a:bodyPr rtlCol="0" anchor="ctr" wrap="square"/>
+          <a:lstStyle/>
+          <a:p>
+            <a:pPr algn="ctr"/>
+          </a:p>
+        </p:txBody>
+      </p:sp>
+      <p:sp>
+        <p:nvSpPr>
+          <p:cNvPr id="13" name="Rectangle 12"/>
+          <p:cNvSpPr/>
+          <p:nvPr/>
+        </p:nvSpPr>
+        <p:spPr>
+          <a:xfrm>
+            <a:off x="5238750" y="3429000"/>
+            <a:ext cx="3714750" cy="47625"/>
+          </a:xfrm>
+          <a:prstGeom prst="rect">
+            <a:avLst/>
+          </a:prstGeom>
+          <a:solidFill>
+            <a:srgbClr val="1E5BC6"/>
+          </a:solidFill>
+          <a:ln>
+            <a:noFill/>
+          </a:ln>
+          <a:effectLst/>
+        </p:spPr>
+        <p:txBody>
+          <a:bodyPr rtlCol="0" anchor="ctr" wrap="square"/>
+          <a:lstStyle/>
+          <a:p>
+            <a:pPr algn="ctr"/>
+          </a:p>
+        </p:txBody>
+      </p:sp>
+      <p:sp>
+        <p:nvSpPr>
+          <p:cNvPr id="14" name="deckgen:ornament"/>
+          <p:cNvSpPr txBox="1"/>
+          <p:nvPr/>
+        </p:nvSpPr>
+        <p:spPr>
+          <a:xfrm>
+            <a:off x="8096250" y="3638550"/>
+            <a:ext cx="590550" cy="400050"/>
           </a:xfrm>
           <a:prstGeom prst="rect">
             <a:avLst/>
@@ -12850,39 +14205,119 @@
           </a:bodyPr>
           <a:lstStyle/>
           <a:p>
-            <a:pPr algn="l">
+            <a:pPr algn="r">
               <a:lnSpc>
                 <a:spcPct val="100000"/>
               </a:lnSpc>
             </a:pPr>
             <a:r>
-              <a:rPr sz="2475" b="1">
-                <a:solidFill>
-                  <a:srgbClr val="0D2B5E"/>
-                </a:solidFill>
-                <a:latin typeface="Pretendard"/>
-                <a:ea typeface="Pretendard"/>
-                <a:cs typeface="Pretendard"/>
-              </a:rPr>
-              <a:t>GROUP BY 집계와 파일 간 JOIN</a:t>
-            </a:r>
-          </a:p>
-        </p:txBody>
-      </p:sp>
-      <p:sp>
-        <p:nvSpPr>
-          <p:cNvPr id="11" name="Rounded Rectangle 10"/>
-          <p:cNvSpPr/>
-          <p:nvPr/>
-        </p:nvSpPr>
-        <p:spPr>
-          <a:xfrm>
-            <a:off x="9372600" y="5257800"/>
-            <a:ext cx="7772400" cy="819150"/>
+              <a:rPr sz="2550" b="1">
+                <a:solidFill>
+                  <a:srgbClr val="3B4B7C"/>
+                </a:solidFill>
+                <a:latin typeface="Pretendard"/>
+                <a:ea typeface="Pretendard"/>
+                <a:cs typeface="Pretendard"/>
+              </a:rPr>
+              <a:t>02</a:t>
+            </a:r>
+          </a:p>
+        </p:txBody>
+      </p:sp>
+      <p:sp>
+        <p:nvSpPr>
+          <p:cNvPr id="15" name="TextBox 14"/>
+          <p:cNvSpPr txBox="1"/>
+          <p:nvPr/>
+        </p:nvSpPr>
+        <p:spPr>
+          <a:xfrm>
+            <a:off x="5562600" y="3752850"/>
+            <a:ext cx="3067050" cy="1828800"/>
+          </a:xfrm>
+          <a:prstGeom prst="rect">
+            <a:avLst/>
+          </a:prstGeom>
+          <a:noFill/>
+        </p:spPr>
+        <p:txBody>
+          <a:bodyPr wrap="square" lIns="0" rIns="0" tIns="0" bIns="0" anchor="ctr">
+            <a:spAutoFit/>
+          </a:bodyPr>
+          <a:lstStyle/>
+          <a:p>
+            <a:pPr>
+              <a:lnSpc>
+                <a:spcPct val="115000"/>
+              </a:lnSpc>
+            </a:pPr>
+            <a:r>
+              <a:rPr sz="2700" b="1">
+                <a:solidFill>
+                  <a:srgbClr val="FFFFFF"/>
+                </a:solidFill>
+                <a:latin typeface="Pretendard"/>
+                <a:ea typeface="Pretendard"/>
+                <a:cs typeface="Pretendard"/>
+              </a:rPr>
+              <a:t>실습 1.5H</a:t>
+            </a:r>
+          </a:p>
+          <a:p>
+            <a:pPr>
+              <a:lnSpc>
+                <a:spcPct val="146000"/>
+              </a:lnSpc>
+              <a:spcBef>
+                <a:spcPts val="1050"/>
+              </a:spcBef>
+            </a:pPr>
+            <a:r>
+              <a:rPr sz="2025" b="0">
+                <a:solidFill>
+                  <a:srgbClr val="D9E2F0"/>
+                </a:solidFill>
+                <a:latin typeface="Pretendard"/>
+                <a:ea typeface="Pretendard"/>
+                <a:cs typeface="Pretendard"/>
+              </a:rPr>
+              <a:t>집계·조인 분석</a:t>
+            </a:r>
+          </a:p>
+          <a:p>
+            <a:pPr>
+              <a:lnSpc>
+                <a:spcPct val="146000"/>
+              </a:lnSpc>
+            </a:pPr>
+            <a:r>
+              <a:rPr sz="2025" b="0">
+                <a:solidFill>
+                  <a:srgbClr val="D9E2F0"/>
+                </a:solidFill>
+                <a:latin typeface="Pretendard"/>
+                <a:ea typeface="Pretendard"/>
+                <a:cs typeface="Pretendard"/>
+              </a:rPr>
+              <a:t>윈도 함수와 CTE</a:t>
+            </a:r>
+          </a:p>
+        </p:txBody>
+      </p:sp>
+      <p:sp>
+        <p:nvSpPr>
+          <p:cNvPr id="16" name="Rounded Rectangle 15"/>
+          <p:cNvSpPr/>
+          <p:nvPr/>
+        </p:nvSpPr>
+        <p:spPr>
+          <a:xfrm>
+            <a:off x="9334500" y="3429000"/>
+            <a:ext cx="3714750" cy="2476500"/>
           </a:xfrm>
           <a:prstGeom prst="roundRect">
             <a:avLst>
-              <a:gd name="adj" fmla="val 6976"/>
+              <a:gd name="adj" fmla="val 1923"/>
             </a:avLst>
           </a:prstGeom>
           <a:solidFill>
@@ -12905,14 +14340,44 @@
       </p:sp>
       <p:sp>
         <p:nvSpPr>
-          <p:cNvPr id="12" name="TextBox 11"/>
+          <p:cNvPr id="17" name="Rectangle 16"/>
+          <p:cNvSpPr/>
+          <p:nvPr/>
+        </p:nvSpPr>
+        <p:spPr>
+          <a:xfrm>
+            <a:off x="9334500" y="3429000"/>
+            <a:ext cx="3714750" cy="47625"/>
+          </a:xfrm>
+          <a:prstGeom prst="rect">
+            <a:avLst/>
+          </a:prstGeom>
+          <a:solidFill>
+            <a:srgbClr val="1E5BC6"/>
+          </a:solidFill>
+          <a:ln>
+            <a:noFill/>
+          </a:ln>
+          <a:effectLst/>
+        </p:spPr>
+        <p:txBody>
+          <a:bodyPr rtlCol="0" anchor="ctr" wrap="square"/>
+          <a:lstStyle/>
+          <a:p>
+            <a:pPr algn="ctr"/>
+          </a:p>
+        </p:txBody>
+      </p:sp>
+      <p:sp>
+        <p:nvSpPr>
+          <p:cNvPr id="18" name="deckgen:ornament"/>
           <p:cNvSpPr txBox="1"/>
           <p:nvPr/>
         </p:nvSpPr>
         <p:spPr>
           <a:xfrm>
-            <a:off x="9658350" y="5486400"/>
-            <a:ext cx="419100" cy="381000"/>
+            <a:off x="12192000" y="3638550"/>
+            <a:ext cx="590550" cy="400050"/>
           </a:xfrm>
           <a:prstGeom prst="rect">
             <a:avLst/>
@@ -12925,35 +14390,35 @@
           </a:bodyPr>
           <a:lstStyle/>
           <a:p>
-            <a:pPr algn="l">
+            <a:pPr algn="r">
               <a:lnSpc>
                 <a:spcPct val="100000"/>
               </a:lnSpc>
             </a:pPr>
             <a:r>
-              <a:rPr sz="2475" b="1">
-                <a:solidFill>
-                  <a:srgbClr val="1E5BC6"/>
-                </a:solidFill>
-                <a:latin typeface="Pretendard"/>
-                <a:ea typeface="Pretendard"/>
-                <a:cs typeface="Pretendard"/>
-              </a:rPr>
-              <a:t>✓</a:t>
-            </a:r>
-          </a:p>
-        </p:txBody>
-      </p:sp>
-      <p:sp>
-        <p:nvSpPr>
-          <p:cNvPr id="13" name="TextBox 12"/>
+              <a:rPr sz="2550" b="1">
+                <a:solidFill>
+                  <a:srgbClr val="E4EBF4"/>
+                </a:solidFill>
+                <a:latin typeface="Pretendard"/>
+                <a:ea typeface="Pretendard"/>
+                <a:cs typeface="Pretendard"/>
+              </a:rPr>
+              <a:t>03</a:t>
+            </a:r>
+          </a:p>
+        </p:txBody>
+      </p:sp>
+      <p:sp>
+        <p:nvSpPr>
+          <p:cNvPr id="19" name="TextBox 18"/>
           <p:cNvSpPr txBox="1"/>
           <p:nvPr/>
         </p:nvSpPr>
         <p:spPr>
           <a:xfrm>
-            <a:off x="10134600" y="5486400"/>
-            <a:ext cx="6724650" cy="381000"/>
+            <a:off x="9658350" y="3752850"/>
+            <a:ext cx="3067050" cy="1828800"/>
           </a:xfrm>
           <a:prstGeom prst="rect">
             <a:avLst/>
@@ -12961,18 +14426,18 @@
           <a:noFill/>
         </p:spPr>
         <p:txBody>
-          <a:bodyPr wrap="square" lIns="0" rIns="0" tIns="0" bIns="0" anchor="t">
+          <a:bodyPr wrap="square" lIns="0" rIns="0" tIns="0" bIns="0" anchor="ctr">
             <a:spAutoFit/>
           </a:bodyPr>
           <a:lstStyle/>
           <a:p>
-            <a:pPr algn="l">
-              <a:lnSpc>
-                <a:spcPct val="100000"/>
-              </a:lnSpc>
-            </a:pPr>
-            <a:r>
-              <a:rPr sz="2475" b="1">
+            <a:pPr>
+              <a:lnSpc>
+                <a:spcPct val="115000"/>
+              </a:lnSpc>
+            </a:pPr>
+            <a:r>
+              <a:rPr sz="2700" b="1">
                 <a:solidFill>
                   <a:srgbClr val="0D2B5E"/>
                 </a:solidFill>
@@ -12980,25 +14445,64 @@
                 <a:ea typeface="Pretendard"/>
                 <a:cs typeface="Pretendard"/>
               </a:rPr>
-              <a:t>rank·누적 합계 — 윈도 함수</a:t>
-            </a:r>
-          </a:p>
-        </p:txBody>
-      </p:sp>
-      <p:sp>
-        <p:nvSpPr>
-          <p:cNvPr id="14" name="Rounded Rectangle 13"/>
-          <p:cNvSpPr/>
-          <p:nvPr/>
-        </p:nvSpPr>
-        <p:spPr>
-          <a:xfrm>
-            <a:off x="1143000" y="6286500"/>
-            <a:ext cx="7772400" cy="819150"/>
+              <a:t>실습 1H</a:t>
+            </a:r>
+          </a:p>
+          <a:p>
+            <a:pPr>
+              <a:lnSpc>
+                <a:spcPct val="146000"/>
+              </a:lnSpc>
+              <a:spcBef>
+                <a:spcPts val="1050"/>
+              </a:spcBef>
+            </a:pPr>
+            <a:r>
+              <a:rPr sz="2025" b="0">
+                <a:solidFill>
+                  <a:srgbClr val="3D3D3D"/>
+                </a:solidFill>
+                <a:latin typeface="Pretendard"/>
+                <a:ea typeface="Pretendard"/>
+                <a:cs typeface="Pretendard"/>
+              </a:rPr>
+              <a:t>Pandas 연동</a:t>
+            </a:r>
+          </a:p>
+          <a:p>
+            <a:pPr>
+              <a:lnSpc>
+                <a:spcPct val="146000"/>
+              </a:lnSpc>
+            </a:pPr>
+            <a:r>
+              <a:rPr sz="2025" b="0">
+                <a:solidFill>
+                  <a:srgbClr val="3D3D3D"/>
+                </a:solidFill>
+                <a:latin typeface="Pretendard"/>
+                <a:ea typeface="Pretendard"/>
+                <a:cs typeface="Pretendard"/>
+              </a:rPr>
+              <a:t>분석</a:t>
+            </a:r>
+          </a:p>
+        </p:txBody>
+      </p:sp>
+      <p:sp>
+        <p:nvSpPr>
+          <p:cNvPr id="20" name="Rounded Rectangle 19"/>
+          <p:cNvSpPr/>
+          <p:nvPr/>
+        </p:nvSpPr>
+        <p:spPr>
+          <a:xfrm>
+            <a:off x="13430250" y="3429000"/>
+            <a:ext cx="3714750" cy="2476500"/>
           </a:xfrm>
           <a:prstGeom prst="roundRect">
             <a:avLst>
-              <a:gd name="adj" fmla="val 6976"/>
+              <a:gd name="adj" fmla="val 1923"/>
             </a:avLst>
           </a:prstGeom>
           <a:solidFill>
@@ -13021,14 +14525,44 @@
       </p:sp>
       <p:sp>
         <p:nvSpPr>
-          <p:cNvPr id="15" name="TextBox 14"/>
+          <p:cNvPr id="21" name="Rectangle 20"/>
+          <p:cNvSpPr/>
+          <p:nvPr/>
+        </p:nvSpPr>
+        <p:spPr>
+          <a:xfrm>
+            <a:off x="13430250" y="3429000"/>
+            <a:ext cx="3714750" cy="47625"/>
+          </a:xfrm>
+          <a:prstGeom prst="rect">
+            <a:avLst/>
+          </a:prstGeom>
+          <a:solidFill>
+            <a:srgbClr val="1E5BC6"/>
+          </a:solidFill>
+          <a:ln>
+            <a:noFill/>
+          </a:ln>
+          <a:effectLst/>
+        </p:spPr>
+        <p:txBody>
+          <a:bodyPr rtlCol="0" anchor="ctr" wrap="square"/>
+          <a:lstStyle/>
+          <a:p>
+            <a:pPr algn="ctr"/>
+          </a:p>
+        </p:txBody>
+      </p:sp>
+      <p:sp>
+        <p:nvSpPr>
+          <p:cNvPr id="22" name="deckgen:ornament"/>
           <p:cNvSpPr txBox="1"/>
           <p:nvPr/>
         </p:nvSpPr>
         <p:spPr>
           <a:xfrm>
-            <a:off x="1428750" y="6515100"/>
-            <a:ext cx="419100" cy="381000"/>
+            <a:off x="16287750" y="3638550"/>
+            <a:ext cx="590550" cy="400050"/>
           </a:xfrm>
           <a:prstGeom prst="rect">
             <a:avLst/>
@@ -13041,35 +14575,145 @@
           </a:bodyPr>
           <a:lstStyle/>
           <a:p>
-            <a:pPr algn="l">
+            <a:pPr algn="r">
               <a:lnSpc>
                 <a:spcPct val="100000"/>
               </a:lnSpc>
             </a:pPr>
             <a:r>
-              <a:rPr sz="2475" b="1">
-                <a:solidFill>
-                  <a:srgbClr val="1E5BC6"/>
-                </a:solidFill>
-                <a:latin typeface="Pretendard"/>
-                <a:ea typeface="Pretendard"/>
-                <a:cs typeface="Pretendard"/>
-              </a:rPr>
-              <a:t>✓</a:t>
-            </a:r>
-          </a:p>
-        </p:txBody>
-      </p:sp>
-      <p:sp>
-        <p:nvSpPr>
-          <p:cNvPr id="16" name="TextBox 15"/>
+              <a:rPr sz="2550" b="1">
+                <a:solidFill>
+                  <a:srgbClr val="E4EBF4"/>
+                </a:solidFill>
+                <a:latin typeface="Pretendard"/>
+                <a:ea typeface="Pretendard"/>
+                <a:cs typeface="Pretendard"/>
+              </a:rPr>
+              <a:t>04</a:t>
+            </a:r>
+          </a:p>
+        </p:txBody>
+      </p:sp>
+      <p:sp>
+        <p:nvSpPr>
+          <p:cNvPr id="23" name="TextBox 22"/>
           <p:cNvSpPr txBox="1"/>
           <p:nvPr/>
         </p:nvSpPr>
         <p:spPr>
           <a:xfrm>
-            <a:off x="1905000" y="6515100"/>
-            <a:ext cx="6724650" cy="381000"/>
+            <a:off x="13754100" y="3752850"/>
+            <a:ext cx="3067050" cy="1828800"/>
+          </a:xfrm>
+          <a:prstGeom prst="rect">
+            <a:avLst/>
+          </a:prstGeom>
+          <a:noFill/>
+        </p:spPr>
+        <p:txBody>
+          <a:bodyPr wrap="square" lIns="0" rIns="0" tIns="0" bIns="0" anchor="ctr">
+            <a:spAutoFit/>
+          </a:bodyPr>
+          <a:lstStyle/>
+          <a:p>
+            <a:pPr>
+              <a:lnSpc>
+                <a:spcPct val="115000"/>
+              </a:lnSpc>
+            </a:pPr>
+            <a:r>
+              <a:rPr sz="2700" b="1">
+                <a:solidFill>
+                  <a:srgbClr val="0D2B5E"/>
+                </a:solidFill>
+                <a:latin typeface="Pretendard"/>
+                <a:ea typeface="Pretendard"/>
+                <a:cs typeface="Pretendard"/>
+              </a:rPr>
+              <a:t>정리 0.5H</a:t>
+            </a:r>
+          </a:p>
+          <a:p>
+            <a:pPr>
+              <a:lnSpc>
+                <a:spcPct val="146000"/>
+              </a:lnSpc>
+              <a:spcBef>
+                <a:spcPts val="1050"/>
+              </a:spcBef>
+            </a:pPr>
+            <a:r>
+              <a:rPr sz="2025" b="0">
+                <a:solidFill>
+                  <a:srgbClr val="3D3D3D"/>
+                </a:solidFill>
+                <a:latin typeface="Pretendard"/>
+                <a:ea typeface="Pretendard"/>
+                <a:cs typeface="Pretendard"/>
+              </a:rPr>
+              <a:t>핵심 요약</a:t>
+            </a:r>
+          </a:p>
+          <a:p>
+            <a:pPr>
+              <a:lnSpc>
+                <a:spcPct val="146000"/>
+              </a:lnSpc>
+            </a:pPr>
+            <a:r>
+              <a:rPr sz="2025" b="0">
+                <a:solidFill>
+                  <a:srgbClr val="3D3D3D"/>
+                </a:solidFill>
+                <a:latin typeface="Pretendard"/>
+                <a:ea typeface="Pretendard"/>
+                <a:cs typeface="Pretendard"/>
+              </a:rPr>
+              <a:t>체크리스트 점검</a:t>
+            </a:r>
+          </a:p>
+        </p:txBody>
+      </p:sp>
+      <p:sp>
+        <p:nvSpPr>
+          <p:cNvPr id="24" name="Rectangle 23"/>
+          <p:cNvSpPr/>
+          <p:nvPr/>
+        </p:nvSpPr>
+        <p:spPr>
+          <a:xfrm>
+            <a:off x="1143000" y="6496050"/>
+            <a:ext cx="47625" cy="723900"/>
+          </a:xfrm>
+          <a:prstGeom prst="rect">
+            <a:avLst/>
+          </a:prstGeom>
+          <a:solidFill>
+            <a:srgbClr val="1E5BC6"/>
+          </a:solidFill>
+          <a:ln>
+            <a:noFill/>
+          </a:ln>
+          <a:effectLst/>
+        </p:spPr>
+        <p:txBody>
+          <a:bodyPr rtlCol="0" anchor="ctr" wrap="square"/>
+          <a:lstStyle/>
+          <a:p>
+            <a:pPr algn="ctr"/>
+          </a:p>
+        </p:txBody>
+      </p:sp>
+      <p:sp>
+        <p:nvSpPr>
+          <p:cNvPr id="25" name="TextBox 24"/>
+          <p:cNvSpPr txBox="1"/>
+          <p:nvPr/>
+        </p:nvSpPr>
+        <p:spPr>
+          <a:xfrm>
+            <a:off x="1390650" y="6553200"/>
+            <a:ext cx="15754350" cy="762000"/>
           </a:xfrm>
           <a:prstGeom prst="rect">
             <a:avLst/>
@@ -13084,67 +14728,63 @@
           <a:p>
             <a:pPr algn="l">
               <a:lnSpc>
-                <a:spcPct val="100000"/>
-              </a:lnSpc>
-            </a:pPr>
-            <a:r>
-              <a:rPr sz="2475" b="1">
-                <a:solidFill>
-                  <a:srgbClr val="0D2B5E"/>
-                </a:solidFill>
-                <a:latin typeface="Pretendard"/>
-                <a:ea typeface="Pretendard"/>
-                <a:cs typeface="Pretendard"/>
-              </a:rPr>
-              <a:t>CTE 로 질의를 읽기 쉬운 단계로</a:t>
-            </a:r>
-          </a:p>
-        </p:txBody>
-      </p:sp>
-      <p:sp>
-        <p:nvSpPr>
-          <p:cNvPr id="17" name="Rounded Rectangle 16"/>
-          <p:cNvSpPr/>
-          <p:nvPr/>
-        </p:nvSpPr>
-        <p:spPr>
-          <a:xfrm>
-            <a:off x="9372600" y="6286500"/>
-            <a:ext cx="7772400" cy="819150"/>
-          </a:xfrm>
-          <a:prstGeom prst="roundRect">
-            <a:avLst>
-              <a:gd name="adj" fmla="val 6976"/>
-            </a:avLst>
-          </a:prstGeom>
-          <a:solidFill>
-            <a:srgbClr val="FAFBFD"/>
-          </a:solidFill>
-          <a:ln w="9525">
-            <a:solidFill>
-              <a:srgbClr val="DCE1E8"/>
-            </a:solidFill>
-          </a:ln>
-          <a:effectLst/>
-        </p:spPr>
-        <p:txBody>
-          <a:bodyPr rtlCol="0" anchor="ctr" wrap="square"/>
-          <a:lstStyle/>
-          <a:p>
-            <a:pPr algn="ctr"/>
-          </a:p>
-        </p:txBody>
-      </p:sp>
-      <p:sp>
-        <p:nvSpPr>
-          <p:cNvPr id="18" name="TextBox 17"/>
+                <a:spcPct val="150000"/>
+              </a:lnSpc>
+            </a:pPr>
+            <a:r>
+              <a:rPr sz="2025" b="1">
+                <a:solidFill>
+                  <a:srgbClr val="7D7D7D"/>
+                </a:solidFill>
+                <a:latin typeface="Pretendard"/>
+                <a:ea typeface="Pretendard"/>
+                <a:cs typeface="Pretendard"/>
+              </a:rPr>
+              <a:t>준비: 수업 전 10분 실습점검 — 파일 넷과 week3 가상환경 · 새로 설치할 것은 없다</a:t>
+            </a:r>
+          </a:p>
+        </p:txBody>
+      </p:sp>
+      <p:sp>
+        <p:nvSpPr>
+          <p:cNvPr id="26" name="Rectangle 25"/>
+          <p:cNvSpPr/>
+          <p:nvPr/>
+        </p:nvSpPr>
+        <p:spPr>
+          <a:xfrm>
+            <a:off x="1143000" y="8058150"/>
+            <a:ext cx="16002000" cy="9525"/>
+          </a:xfrm>
+          <a:prstGeom prst="rect">
+            <a:avLst/>
+          </a:prstGeom>
+          <a:solidFill>
+            <a:srgbClr val="DCE1E8"/>
+          </a:solidFill>
+          <a:ln>
+            <a:noFill/>
+          </a:ln>
+          <a:effectLst/>
+        </p:spPr>
+        <p:txBody>
+          <a:bodyPr rtlCol="0" anchor="ctr" wrap="square"/>
+          <a:lstStyle/>
+          <a:p>
+            <a:pPr algn="ctr"/>
+          </a:p>
+        </p:txBody>
+      </p:sp>
+      <p:sp>
+        <p:nvSpPr>
+          <p:cNvPr id="27" name="TextBox 26"/>
           <p:cNvSpPr txBox="1"/>
           <p:nvPr/>
         </p:nvSpPr>
         <p:spPr>
           <a:xfrm>
-            <a:off x="9658350" y="6515100"/>
-            <a:ext cx="419100" cy="381000"/>
+            <a:off x="1143000" y="8248650"/>
+            <a:ext cx="13335000" cy="323850"/>
           </a:xfrm>
           <a:prstGeom prst="rect">
             <a:avLst/>
@@ -13163,29 +14803,29 @@
               </a:lnSpc>
             </a:pPr>
             <a:r>
-              <a:rPr sz="2475" b="1">
-                <a:solidFill>
-                  <a:srgbClr val="1E5BC6"/>
-                </a:solidFill>
-                <a:latin typeface="Pretendard"/>
-                <a:ea typeface="Pretendard"/>
-                <a:cs typeface="Pretendard"/>
-              </a:rPr>
-              <a:t>✓</a:t>
-            </a:r>
-          </a:p>
-        </p:txBody>
-      </p:sp>
-      <p:sp>
-        <p:nvSpPr>
-          <p:cNvPr id="19" name="TextBox 18"/>
+              <a:rPr sz="1725" b="0">
+                <a:solidFill>
+                  <a:srgbClr val="7D7D7D"/>
+                </a:solidFill>
+                <a:latin typeface="Pretendard"/>
+                <a:ea typeface="Pretendard"/>
+                <a:cs typeface="Pretendard"/>
+              </a:rPr>
+              <a:t>데이터 엔지니어링 &amp; RAG 파이프라인 160H · 3-3 · 정리·회고 0.5H</a:t>
+            </a:r>
+          </a:p>
+        </p:txBody>
+      </p:sp>
+      <p:sp>
+        <p:nvSpPr>
+          <p:cNvPr id="28" name="TextBox 27"/>
           <p:cNvSpPr txBox="1"/>
           <p:nvPr/>
         </p:nvSpPr>
         <p:spPr>
           <a:xfrm>
-            <a:off x="10134600" y="6515100"/>
-            <a:ext cx="6724650" cy="381000"/>
+            <a:off x="15240000" y="8248650"/>
+            <a:ext cx="1905000" cy="323850"/>
           </a:xfrm>
           <a:prstGeom prst="rect">
             <a:avLst/>
@@ -13198,133 +14838,21 @@
           </a:bodyPr>
           <a:lstStyle/>
           <a:p>
-            <a:pPr algn="l">
+            <a:pPr algn="r">
               <a:lnSpc>
                 <a:spcPct val="100000"/>
               </a:lnSpc>
             </a:pPr>
             <a:r>
-              <a:rPr sz="2475" b="1">
-                <a:solidFill>
-                  <a:srgbClr val="0D2B5E"/>
-                </a:solidFill>
-                <a:latin typeface="Pretendard"/>
-                <a:ea typeface="Pretendard"/>
-                <a:cs typeface="Pretendard"/>
-              </a:rPr>
-              <a:t>어떤 일은 SQL, 어떤 일은 Pandas</a:t>
-            </a:r>
-          </a:p>
-        </p:txBody>
-      </p:sp>
-      <p:sp>
-        <p:nvSpPr>
-          <p:cNvPr id="20" name="Rectangle 19"/>
-          <p:cNvSpPr/>
-          <p:nvPr/>
-        </p:nvSpPr>
-        <p:spPr>
-          <a:xfrm>
-            <a:off x="1143000" y="7715250"/>
-            <a:ext cx="47625" cy="819150"/>
-          </a:xfrm>
-          <a:prstGeom prst="rect">
-            <a:avLst/>
-          </a:prstGeom>
-          <a:solidFill>
-            <a:srgbClr val="1E5BC6"/>
-          </a:solidFill>
-          <a:ln>
-            <a:noFill/>
-          </a:ln>
-          <a:effectLst/>
-        </p:spPr>
-        <p:txBody>
-          <a:bodyPr rtlCol="0" anchor="ctr" wrap="square"/>
-          <a:lstStyle/>
-          <a:p>
-            <a:pPr algn="ctr"/>
-          </a:p>
-        </p:txBody>
-      </p:sp>
-      <p:sp>
-        <p:nvSpPr>
-          <p:cNvPr id="21" name="TextBox 20"/>
-          <p:cNvSpPr txBox="1"/>
-          <p:nvPr/>
-        </p:nvSpPr>
-        <p:spPr>
-          <a:xfrm>
-            <a:off x="1409700" y="7734300"/>
-            <a:ext cx="8572500" cy="304800"/>
-          </a:xfrm>
-          <a:prstGeom prst="rect">
-            <a:avLst/>
-          </a:prstGeom>
-          <a:noFill/>
-        </p:spPr>
-        <p:txBody>
-          <a:bodyPr wrap="square" lIns="0" rIns="0" tIns="0" bIns="0" anchor="t">
-            <a:spAutoFit/>
-          </a:bodyPr>
-          <a:lstStyle/>
-          <a:p>
-            <a:pPr algn="l">
-              <a:lnSpc>
-                <a:spcPct val="100000"/>
-              </a:lnSpc>
-            </a:pPr>
-            <a:r>
-              <a:rPr sz="1800" b="1" spc="140">
-                <a:solidFill>
-                  <a:srgbClr val="1E5BC6"/>
-                </a:solidFill>
-                <a:latin typeface="Pretendard"/>
-                <a:ea typeface="Pretendard"/>
-                <a:cs typeface="Pretendard"/>
-              </a:rPr>
-              <a:t>준비할 것</a:t>
-            </a:r>
-          </a:p>
-        </p:txBody>
-      </p:sp>
-      <p:sp>
-        <p:nvSpPr>
-          <p:cNvPr id="22" name="TextBox 21"/>
-          <p:cNvSpPr txBox="1"/>
-          <p:nvPr/>
-        </p:nvSpPr>
-        <p:spPr>
-          <a:xfrm>
-            <a:off x="1409700" y="8077200"/>
-            <a:ext cx="8572500" cy="400050"/>
-          </a:xfrm>
-          <a:prstGeom prst="rect">
-            <a:avLst/>
-          </a:prstGeom>
-          <a:noFill/>
-        </p:spPr>
-        <p:txBody>
-          <a:bodyPr wrap="square" lIns="0" rIns="0" tIns="0" bIns="0" anchor="t">
-            <a:spAutoFit/>
-          </a:bodyPr>
-          <a:lstStyle/>
-          <a:p>
-            <a:pPr algn="l">
-              <a:lnSpc>
-                <a:spcPct val="100000"/>
-              </a:lnSpc>
-            </a:pPr>
-            <a:r>
-              <a:rPr sz="2400" b="1">
-                <a:solidFill>
-                  <a:srgbClr val="0D2B5E"/>
-                </a:solidFill>
-                <a:latin typeface="Pretendard"/>
-                <a:ea typeface="Pretendard"/>
-                <a:cs typeface="Pretendard"/>
-              </a:rPr>
-              <a:t>세 파일이 없으면 각 차시 생성 단계 먼저(시드 고정)</a:t>
+              <a:rPr sz="1725" b="0">
+                <a:solidFill>
+                  <a:srgbClr val="7D7D7D"/>
+                </a:solidFill>
+                <a:latin typeface="Pretendard"/>
+                <a:ea typeface="Pretendard"/>
+                <a:cs typeface="Pretendard"/>
+              </a:rPr>
+              <a:t>09</a:t>
             </a:r>
           </a:p>
         </p:txBody>
